--- a/docu/AWS-Architecture.pptx
+++ b/docu/AWS-Architecture.pptx
@@ -5,7 +5,8 @@
     <p:sldMasterId id="2147483648" r:id="rId1"/>
   </p:sldMasterIdLst>
   <p:sldIdLst>
-    <p:sldId id="256" r:id="rId2"/>
+    <p:sldId id="257" r:id="rId2"/>
+    <p:sldId id="256" r:id="rId3"/>
   </p:sldIdLst>
   <p:sldSz cx="12192000" cy="6858000"/>
   <p:notesSz cx="6858000" cy="9144000"/>
@@ -104,6 +105,11 @@
       </a:defRPr>
     </a:lvl9pPr>
   </p:defaultTextStyle>
+  <p:extLst>
+    <p:ext uri="{EFAFB233-063F-42B5-8137-9DF3F51BA10A}">
+      <p15:sldGuideLst xmlns:p15="http://schemas.microsoft.com/office/powerpoint/2012/main"/>
+    </p:ext>
+  </p:extLst>
 </p:presentation>
 </file>
 
@@ -256,7 +262,7 @@
           <a:p>
             <a:fld id="{6B4691EA-DFA8-437B-AC58-1971B4E320FD}" type="datetimeFigureOut">
               <a:rPr lang="de-CH" smtClean="0"/>
-              <a:t>17.12.2025</a:t>
+              <a:t>18.12.2025</a:t>
             </a:fld>
             <a:endParaRPr lang="de-CH"/>
           </a:p>
@@ -456,7 +462,7 @@
           <a:p>
             <a:fld id="{6B4691EA-DFA8-437B-AC58-1971B4E320FD}" type="datetimeFigureOut">
               <a:rPr lang="de-CH" smtClean="0"/>
-              <a:t>17.12.2025</a:t>
+              <a:t>18.12.2025</a:t>
             </a:fld>
             <a:endParaRPr lang="de-CH"/>
           </a:p>
@@ -666,7 +672,7 @@
           <a:p>
             <a:fld id="{6B4691EA-DFA8-437B-AC58-1971B4E320FD}" type="datetimeFigureOut">
               <a:rPr lang="de-CH" smtClean="0"/>
-              <a:t>17.12.2025</a:t>
+              <a:t>18.12.2025</a:t>
             </a:fld>
             <a:endParaRPr lang="de-CH"/>
           </a:p>
@@ -866,7 +872,7 @@
           <a:p>
             <a:fld id="{6B4691EA-DFA8-437B-AC58-1971B4E320FD}" type="datetimeFigureOut">
               <a:rPr lang="de-CH" smtClean="0"/>
-              <a:t>17.12.2025</a:t>
+              <a:t>18.12.2025</a:t>
             </a:fld>
             <a:endParaRPr lang="de-CH"/>
           </a:p>
@@ -1142,7 +1148,7 @@
           <a:p>
             <a:fld id="{6B4691EA-DFA8-437B-AC58-1971B4E320FD}" type="datetimeFigureOut">
               <a:rPr lang="de-CH" smtClean="0"/>
-              <a:t>17.12.2025</a:t>
+              <a:t>18.12.2025</a:t>
             </a:fld>
             <a:endParaRPr lang="de-CH"/>
           </a:p>
@@ -1410,7 +1416,7 @@
           <a:p>
             <a:fld id="{6B4691EA-DFA8-437B-AC58-1971B4E320FD}" type="datetimeFigureOut">
               <a:rPr lang="de-CH" smtClean="0"/>
-              <a:t>17.12.2025</a:t>
+              <a:t>18.12.2025</a:t>
             </a:fld>
             <a:endParaRPr lang="de-CH"/>
           </a:p>
@@ -1825,7 +1831,7 @@
           <a:p>
             <a:fld id="{6B4691EA-DFA8-437B-AC58-1971B4E320FD}" type="datetimeFigureOut">
               <a:rPr lang="de-CH" smtClean="0"/>
-              <a:t>17.12.2025</a:t>
+              <a:t>18.12.2025</a:t>
             </a:fld>
             <a:endParaRPr lang="de-CH"/>
           </a:p>
@@ -1967,7 +1973,7 @@
           <a:p>
             <a:fld id="{6B4691EA-DFA8-437B-AC58-1971B4E320FD}" type="datetimeFigureOut">
               <a:rPr lang="de-CH" smtClean="0"/>
-              <a:t>17.12.2025</a:t>
+              <a:t>18.12.2025</a:t>
             </a:fld>
             <a:endParaRPr lang="de-CH"/>
           </a:p>
@@ -2080,7 +2086,7 @@
           <a:p>
             <a:fld id="{6B4691EA-DFA8-437B-AC58-1971B4E320FD}" type="datetimeFigureOut">
               <a:rPr lang="de-CH" smtClean="0"/>
-              <a:t>17.12.2025</a:t>
+              <a:t>18.12.2025</a:t>
             </a:fld>
             <a:endParaRPr lang="de-CH"/>
           </a:p>
@@ -2393,7 +2399,7 @@
           <a:p>
             <a:fld id="{6B4691EA-DFA8-437B-AC58-1971B4E320FD}" type="datetimeFigureOut">
               <a:rPr lang="de-CH" smtClean="0"/>
-              <a:t>17.12.2025</a:t>
+              <a:t>18.12.2025</a:t>
             </a:fld>
             <a:endParaRPr lang="de-CH"/>
           </a:p>
@@ -2682,7 +2688,7 @@
           <a:p>
             <a:fld id="{6B4691EA-DFA8-437B-AC58-1971B4E320FD}" type="datetimeFigureOut">
               <a:rPr lang="de-CH" smtClean="0"/>
-              <a:t>17.12.2025</a:t>
+              <a:t>18.12.2025</a:t>
             </a:fld>
             <a:endParaRPr lang="de-CH"/>
           </a:p>
@@ -2925,7 +2931,7 @@
           <a:p>
             <a:fld id="{6B4691EA-DFA8-437B-AC58-1971B4E320FD}" type="datetimeFigureOut">
               <a:rPr lang="de-CH" smtClean="0"/>
-              <a:t>17.12.2025</a:t>
+              <a:t>18.12.2025</a:t>
             </a:fld>
             <a:endParaRPr lang="de-CH"/>
           </a:p>
@@ -3330,7 +3336,13 @@
   <p:cSld>
     <p:spTree>
       <p:nvGrpSpPr>
-        <p:cNvPr id="1" name=""/>
+        <p:cNvPr id="1" name="">
+          <a:extLst>
+            <a:ext uri="{FF2B5EF4-FFF2-40B4-BE49-F238E27FC236}">
+              <a16:creationId xmlns:a16="http://schemas.microsoft.com/office/drawing/2014/main" id="{9AE0D2E3-7561-84E8-AB02-975C31068E2E}"/>
+            </a:ext>
+          </a:extLst>
+        </p:cNvPr>
         <p:cNvGrpSpPr/>
         <p:nvPr/>
       </p:nvGrpSpPr>
@@ -3347,7 +3359,7 @@
           <p:cNvPr id="5" name="Rectangle 54">
             <a:extLst>
               <a:ext uri="{FF2B5EF4-FFF2-40B4-BE49-F238E27FC236}">
-                <a16:creationId xmlns:a16="http://schemas.microsoft.com/office/drawing/2014/main" id="{302A5B0E-ABA9-48CD-84D0-B78867AD79EC}"/>
+                <a16:creationId xmlns:a16="http://schemas.microsoft.com/office/drawing/2014/main" id="{EFFA25B7-84D6-DA40-3EB8-B9448CD99C3D}"/>
               </a:ext>
             </a:extLst>
           </p:cNvPr>
@@ -3356,7 +3368,7 @@
         </p:nvSpPr>
         <p:spPr>
           <a:xfrm>
-            <a:off x="1335573" y="359625"/>
+            <a:off x="1318320" y="1032485"/>
             <a:ext cx="9322902" cy="5081127"/>
           </a:xfrm>
           <a:prstGeom prst="rect">
@@ -3537,7 +3549,7 @@
           <p:cNvPr id="6" name="Graphic 55" descr="AWS Cloud group icon with AWS logo.">
             <a:extLst>
               <a:ext uri="{FF2B5EF4-FFF2-40B4-BE49-F238E27FC236}">
-                <a16:creationId xmlns:a16="http://schemas.microsoft.com/office/drawing/2014/main" id="{8AB2D835-9413-49FA-ACE8-763B2FFE233A}"/>
+                <a16:creationId xmlns:a16="http://schemas.microsoft.com/office/drawing/2014/main" id="{4C5F8306-A7DA-E0B9-F8BA-AD251F0590D0}"/>
               </a:ext>
             </a:extLst>
           </p:cNvPr>
@@ -3559,7 +3571,1829 @@
         </p:blipFill>
         <p:spPr>
           <a:xfrm>
-            <a:off x="1335573" y="359625"/>
+            <a:off x="1318320" y="1032485"/>
+            <a:ext cx="710227" cy="710227"/>
+          </a:xfrm>
+          <a:prstGeom prst="rect">
+            <a:avLst/>
+          </a:prstGeom>
+        </p:spPr>
+      </p:pic>
+      <p:pic>
+        <p:nvPicPr>
+          <p:cNvPr id="64" name="Graphic 68" descr="Client resource icon for the General Icons category.">
+            <a:extLst>
+              <a:ext uri="{FF2B5EF4-FFF2-40B4-BE49-F238E27FC236}">
+                <a16:creationId xmlns:a16="http://schemas.microsoft.com/office/drawing/2014/main" id="{7580BAD7-BED9-09EB-09E3-4F8CBD56AC61}"/>
+              </a:ext>
+            </a:extLst>
+          </p:cNvPr>
+          <p:cNvPicPr>
+            <a:picLocks noChangeAspect="1"/>
+          </p:cNvPicPr>
+          <p:nvPr/>
+        </p:nvPicPr>
+        <p:blipFill>
+          <a:blip r:embed="rId4">
+            <a:extLst>
+              <a:ext uri="{96DAC541-7B7A-43D3-8B79-37D633B846F1}">
+                <asvg:svgBlip xmlns:asvg="http://schemas.microsoft.com/office/drawing/2016/SVG/main" r:embed="rId5"/>
+              </a:ext>
+            </a:extLst>
+          </a:blip>
+          <a:stretch>
+            <a:fillRect/>
+          </a:stretch>
+        </p:blipFill>
+        <p:spPr>
+          <a:xfrm>
+            <a:off x="2139515" y="3610505"/>
+            <a:ext cx="650839" cy="650839"/>
+          </a:xfrm>
+          <a:prstGeom prst="rect">
+            <a:avLst/>
+          </a:prstGeom>
+        </p:spPr>
+      </p:pic>
+      <p:sp>
+        <p:nvSpPr>
+          <p:cNvPr id="65" name="TextBox 25">
+            <a:extLst>
+              <a:ext uri="{FF2B5EF4-FFF2-40B4-BE49-F238E27FC236}">
+                <a16:creationId xmlns:a16="http://schemas.microsoft.com/office/drawing/2014/main" id="{90594D3B-97FE-29F7-C28C-0D67E8CCED28}"/>
+              </a:ext>
+            </a:extLst>
+          </p:cNvPr>
+          <p:cNvSpPr txBox="1">
+            <a:spLocks noChangeArrowheads="1"/>
+          </p:cNvSpPr>
+          <p:nvPr/>
+        </p:nvSpPr>
+        <p:spPr bwMode="auto">
+          <a:xfrm>
+            <a:off x="1872722" y="4293737"/>
+            <a:ext cx="1073150" cy="276999"/>
+          </a:xfrm>
+          <a:prstGeom prst="rect">
+            <a:avLst/>
+          </a:prstGeom>
+          <a:noFill/>
+          <a:ln>
+            <a:noFill/>
+          </a:ln>
+          <a:extLst>
+            <a:ext uri="{909E8E84-426E-40DD-AFC4-6F175D3DCCD1}">
+              <a14:hiddenFill xmlns:a14="http://schemas.microsoft.com/office/drawing/2010/main">
+                <a:solidFill>
+                  <a:srgbClr val="FFFFFF"/>
+                </a:solidFill>
+              </a14:hiddenFill>
+            </a:ext>
+            <a:ext uri="{91240B29-F687-4F45-9708-019B960494DF}">
+              <a14:hiddenLine xmlns:a14="http://schemas.microsoft.com/office/drawing/2010/main" w="9525">
+                <a:solidFill>
+                  <a:srgbClr val="000000"/>
+                </a:solidFill>
+                <a:miter lim="800000"/>
+                <a:headEnd/>
+                <a:tailEnd/>
+              </a14:hiddenLine>
+            </a:ext>
+          </a:extLst>
+        </p:spPr>
+        <p:txBody>
+          <a:bodyPr>
+            <a:spAutoFit/>
+          </a:bodyPr>
+          <a:lstStyle>
+            <a:defPPr>
+              <a:defRPr lang="en-US"/>
+            </a:defPPr>
+            <a:lvl1pPr algn="l" rtl="0" eaLnBrk="0" fontAlgn="base" hangingPunct="0">
+              <a:spcBef>
+                <a:spcPct val="0"/>
+              </a:spcBef>
+              <a:spcAft>
+                <a:spcPct val="0"/>
+              </a:spcAft>
+              <a:defRPr kern="1200">
+                <a:solidFill>
+                  <a:schemeClr val="tx1"/>
+                </a:solidFill>
+                <a:latin typeface="Calibri" panose="020F0502020204030204" pitchFamily="34" charset="0"/>
+                <a:ea typeface="+mn-ea"/>
+                <a:cs typeface="+mn-cs"/>
+              </a:defRPr>
+            </a:lvl1pPr>
+            <a:lvl2pPr marL="742950" indent="-285750" algn="l" rtl="0" eaLnBrk="0" fontAlgn="base" hangingPunct="0">
+              <a:spcBef>
+                <a:spcPct val="0"/>
+              </a:spcBef>
+              <a:spcAft>
+                <a:spcPct val="0"/>
+              </a:spcAft>
+              <a:defRPr kern="1200">
+                <a:solidFill>
+                  <a:schemeClr val="tx1"/>
+                </a:solidFill>
+                <a:latin typeface="Calibri" panose="020F0502020204030204" pitchFamily="34" charset="0"/>
+                <a:ea typeface="+mn-ea"/>
+                <a:cs typeface="+mn-cs"/>
+              </a:defRPr>
+            </a:lvl2pPr>
+            <a:lvl3pPr marL="1143000" indent="-228600" algn="l" rtl="0" eaLnBrk="0" fontAlgn="base" hangingPunct="0">
+              <a:spcBef>
+                <a:spcPct val="0"/>
+              </a:spcBef>
+              <a:spcAft>
+                <a:spcPct val="0"/>
+              </a:spcAft>
+              <a:defRPr kern="1200">
+                <a:solidFill>
+                  <a:schemeClr val="tx1"/>
+                </a:solidFill>
+                <a:latin typeface="Calibri" panose="020F0502020204030204" pitchFamily="34" charset="0"/>
+                <a:ea typeface="+mn-ea"/>
+                <a:cs typeface="+mn-cs"/>
+              </a:defRPr>
+            </a:lvl3pPr>
+            <a:lvl4pPr marL="1600200" indent="-228600" algn="l" rtl="0" eaLnBrk="0" fontAlgn="base" hangingPunct="0">
+              <a:spcBef>
+                <a:spcPct val="0"/>
+              </a:spcBef>
+              <a:spcAft>
+                <a:spcPct val="0"/>
+              </a:spcAft>
+              <a:defRPr kern="1200">
+                <a:solidFill>
+                  <a:schemeClr val="tx1"/>
+                </a:solidFill>
+                <a:latin typeface="Calibri" panose="020F0502020204030204" pitchFamily="34" charset="0"/>
+                <a:ea typeface="+mn-ea"/>
+                <a:cs typeface="+mn-cs"/>
+              </a:defRPr>
+            </a:lvl4pPr>
+            <a:lvl5pPr marL="2057400" indent="-228600" algn="l" rtl="0" eaLnBrk="0" fontAlgn="base" hangingPunct="0">
+              <a:spcBef>
+                <a:spcPct val="0"/>
+              </a:spcBef>
+              <a:spcAft>
+                <a:spcPct val="0"/>
+              </a:spcAft>
+              <a:defRPr kern="1200">
+                <a:solidFill>
+                  <a:schemeClr val="tx1"/>
+                </a:solidFill>
+                <a:latin typeface="Calibri" panose="020F0502020204030204" pitchFamily="34" charset="0"/>
+                <a:ea typeface="+mn-ea"/>
+                <a:cs typeface="+mn-cs"/>
+              </a:defRPr>
+            </a:lvl5pPr>
+            <a:lvl6pPr marL="2514600" indent="-228600" algn="l" defTabSz="914400" rtl="0" eaLnBrk="0" fontAlgn="base" latinLnBrk="0" hangingPunct="0">
+              <a:spcBef>
+                <a:spcPct val="0"/>
+              </a:spcBef>
+              <a:spcAft>
+                <a:spcPct val="0"/>
+              </a:spcAft>
+              <a:defRPr kern="1200">
+                <a:solidFill>
+                  <a:schemeClr val="tx1"/>
+                </a:solidFill>
+                <a:latin typeface="Calibri" panose="020F0502020204030204" pitchFamily="34" charset="0"/>
+                <a:ea typeface="+mn-ea"/>
+                <a:cs typeface="+mn-cs"/>
+              </a:defRPr>
+            </a:lvl6pPr>
+            <a:lvl7pPr marL="2971800" indent="-228600" algn="l" defTabSz="914400" rtl="0" eaLnBrk="0" fontAlgn="base" latinLnBrk="0" hangingPunct="0">
+              <a:spcBef>
+                <a:spcPct val="0"/>
+              </a:spcBef>
+              <a:spcAft>
+                <a:spcPct val="0"/>
+              </a:spcAft>
+              <a:defRPr kern="1200">
+                <a:solidFill>
+                  <a:schemeClr val="tx1"/>
+                </a:solidFill>
+                <a:latin typeface="Calibri" panose="020F0502020204030204" pitchFamily="34" charset="0"/>
+                <a:ea typeface="+mn-ea"/>
+                <a:cs typeface="+mn-cs"/>
+              </a:defRPr>
+            </a:lvl7pPr>
+            <a:lvl8pPr marL="3429000" indent="-228600" algn="l" defTabSz="914400" rtl="0" eaLnBrk="0" fontAlgn="base" latinLnBrk="0" hangingPunct="0">
+              <a:spcBef>
+                <a:spcPct val="0"/>
+              </a:spcBef>
+              <a:spcAft>
+                <a:spcPct val="0"/>
+              </a:spcAft>
+              <a:defRPr kern="1200">
+                <a:solidFill>
+                  <a:schemeClr val="tx1"/>
+                </a:solidFill>
+                <a:latin typeface="Calibri" panose="020F0502020204030204" pitchFamily="34" charset="0"/>
+                <a:ea typeface="+mn-ea"/>
+                <a:cs typeface="+mn-cs"/>
+              </a:defRPr>
+            </a:lvl8pPr>
+            <a:lvl9pPr marL="3886200" indent="-228600" algn="l" defTabSz="914400" rtl="0" eaLnBrk="0" fontAlgn="base" latinLnBrk="0" hangingPunct="0">
+              <a:spcBef>
+                <a:spcPct val="0"/>
+              </a:spcBef>
+              <a:spcAft>
+                <a:spcPct val="0"/>
+              </a:spcAft>
+              <a:defRPr kern="1200">
+                <a:solidFill>
+                  <a:schemeClr val="tx1"/>
+                </a:solidFill>
+                <a:latin typeface="Calibri" panose="020F0502020204030204" pitchFamily="34" charset="0"/>
+                <a:ea typeface="+mn-ea"/>
+                <a:cs typeface="+mn-cs"/>
+              </a:defRPr>
+            </a:lvl9pPr>
+          </a:lstStyle>
+          <a:p>
+            <a:pPr algn="ctr" eaLnBrk="1" hangingPunct="1"/>
+            <a:r>
+              <a:rPr lang="en-US" altLang="en-US" sz="1200" dirty="0">
+                <a:latin typeface="Arial" panose="020B0604020202020204" pitchFamily="34" charset="0"/>
+                <a:cs typeface="Arial" panose="020B0604020202020204" pitchFamily="34" charset="0"/>
+              </a:rPr>
+              <a:t>Client</a:t>
+            </a:r>
+          </a:p>
+        </p:txBody>
+      </p:sp>
+      <p:sp>
+        <p:nvSpPr>
+          <p:cNvPr id="122" name="Textfeld 121">
+            <a:extLst>
+              <a:ext uri="{FF2B5EF4-FFF2-40B4-BE49-F238E27FC236}">
+                <a16:creationId xmlns:a16="http://schemas.microsoft.com/office/drawing/2014/main" id="{3988FD88-C6A3-AABD-ABD4-013AD0899462}"/>
+              </a:ext>
+            </a:extLst>
+          </p:cNvPr>
+          <p:cNvSpPr txBox="1"/>
+          <p:nvPr/>
+        </p:nvSpPr>
+        <p:spPr>
+          <a:xfrm>
+            <a:off x="4742965" y="5485188"/>
+            <a:ext cx="2329612" cy="276999"/>
+          </a:xfrm>
+          <a:prstGeom prst="rect">
+            <a:avLst/>
+          </a:prstGeom>
+          <a:noFill/>
+        </p:spPr>
+        <p:txBody>
+          <a:bodyPr wrap="none" rtlCol="0">
+            <a:spAutoFit/>
+          </a:bodyPr>
+          <a:lstStyle/>
+          <a:p>
+            <a:r>
+              <a:rPr lang="de-DE" sz="1200" dirty="0" err="1"/>
+              <a:t>upload</a:t>
+            </a:r>
+            <a:r>
+              <a:rPr lang="de-DE" sz="1200" dirty="0"/>
+              <a:t> / </a:t>
+            </a:r>
+            <a:r>
+              <a:rPr lang="de-DE" sz="1200" dirty="0" err="1"/>
+              <a:t>download</a:t>
+            </a:r>
+            <a:r>
+              <a:rPr lang="de-DE" sz="1200" dirty="0"/>
+              <a:t> via </a:t>
+            </a:r>
+            <a:r>
+              <a:rPr lang="de-DE" sz="1200" dirty="0" err="1"/>
+              <a:t>signed</a:t>
+            </a:r>
+            <a:r>
+              <a:rPr lang="de-DE" sz="1200" dirty="0"/>
+              <a:t> </a:t>
+            </a:r>
+            <a:r>
+              <a:rPr lang="de-DE" sz="1200" dirty="0" err="1"/>
+              <a:t>url</a:t>
+            </a:r>
+            <a:endParaRPr lang="de-CH" sz="1200" dirty="0"/>
+          </a:p>
+        </p:txBody>
+      </p:sp>
+      <p:sp>
+        <p:nvSpPr>
+          <p:cNvPr id="2" name="Textfeld 1">
+            <a:extLst>
+              <a:ext uri="{FF2B5EF4-FFF2-40B4-BE49-F238E27FC236}">
+                <a16:creationId xmlns:a16="http://schemas.microsoft.com/office/drawing/2014/main" id="{34B36C27-35E2-76DB-DE07-E9580D647722}"/>
+              </a:ext>
+            </a:extLst>
+          </p:cNvPr>
+          <p:cNvSpPr txBox="1"/>
+          <p:nvPr/>
+        </p:nvSpPr>
+        <p:spPr>
+          <a:xfrm>
+            <a:off x="4295490" y="547328"/>
+            <a:ext cx="2443489" cy="369332"/>
+          </a:xfrm>
+          <a:prstGeom prst="rect">
+            <a:avLst/>
+          </a:prstGeom>
+          <a:noFill/>
+        </p:spPr>
+        <p:txBody>
+          <a:bodyPr wrap="none" rtlCol="0">
+            <a:spAutoFit/>
+          </a:bodyPr>
+          <a:lstStyle/>
+          <a:p>
+            <a:r>
+              <a:rPr lang="de-DE" dirty="0"/>
+              <a:t>Architecture </a:t>
+            </a:r>
+            <a:r>
+              <a:rPr lang="de-DE" dirty="0" err="1"/>
+              <a:t>simplified</a:t>
+            </a:r>
+            <a:endParaRPr lang="de-CH" dirty="0"/>
+          </a:p>
+        </p:txBody>
+      </p:sp>
+      <p:pic>
+        <p:nvPicPr>
+          <p:cNvPr id="3" name="Graphic 7" descr="Amazon API Gateway service icon.">
+            <a:extLst>
+              <a:ext uri="{FF2B5EF4-FFF2-40B4-BE49-F238E27FC236}">
+                <a16:creationId xmlns:a16="http://schemas.microsoft.com/office/drawing/2014/main" id="{10686CB2-0E27-278D-A9CB-F33F9B076D59}"/>
+              </a:ext>
+            </a:extLst>
+          </p:cNvPr>
+          <p:cNvPicPr>
+            <a:picLocks noChangeAspect="1" noChangeArrowheads="1"/>
+          </p:cNvPicPr>
+          <p:nvPr/>
+        </p:nvPicPr>
+        <p:blipFill>
+          <a:blip r:embed="rId6">
+            <a:extLst>
+              <a:ext uri="{96DAC541-7B7A-43D3-8B79-37D633B846F1}">
+                <asvg:svgBlip xmlns:asvg="http://schemas.microsoft.com/office/drawing/2016/SVG/main" r:embed="rId7"/>
+              </a:ext>
+            </a:extLst>
+          </a:blip>
+          <a:srcRect/>
+          <a:stretch/>
+        </p:blipFill>
+        <p:spPr bwMode="auto">
+          <a:xfrm>
+            <a:off x="4124557" y="3521151"/>
+            <a:ext cx="762000" cy="762000"/>
+          </a:xfrm>
+          <a:prstGeom prst="rect">
+            <a:avLst/>
+          </a:prstGeom>
+          <a:noFill/>
+          <a:ln>
+            <a:noFill/>
+          </a:ln>
+          <a:extLst>
+            <a:ext uri="{909E8E84-426E-40DD-AFC4-6F175D3DCCD1}">
+              <a14:hiddenFill xmlns:a14="http://schemas.microsoft.com/office/drawing/2010/main">
+                <a:solidFill>
+                  <a:srgbClr val="FFFFFF"/>
+                </a:solidFill>
+              </a14:hiddenFill>
+            </a:ext>
+            <a:ext uri="{91240B29-F687-4F45-9708-019B960494DF}">
+              <a14:hiddenLine xmlns:a14="http://schemas.microsoft.com/office/drawing/2010/main" w="9525">
+                <a:solidFill>
+                  <a:srgbClr val="000000"/>
+                </a:solidFill>
+                <a:miter lim="800000"/>
+                <a:headEnd/>
+                <a:tailEnd/>
+              </a14:hiddenLine>
+            </a:ext>
+          </a:extLst>
+        </p:spPr>
+      </p:pic>
+      <p:sp>
+        <p:nvSpPr>
+          <p:cNvPr id="4" name="TextBox 9">
+            <a:extLst>
+              <a:ext uri="{FF2B5EF4-FFF2-40B4-BE49-F238E27FC236}">
+                <a16:creationId xmlns:a16="http://schemas.microsoft.com/office/drawing/2014/main" id="{81BC3517-6C6D-63B1-5B85-7E9B8A9ACA01}"/>
+              </a:ext>
+            </a:extLst>
+          </p:cNvPr>
+          <p:cNvSpPr txBox="1">
+            <a:spLocks noChangeArrowheads="1"/>
+          </p:cNvSpPr>
+          <p:nvPr/>
+        </p:nvSpPr>
+        <p:spPr bwMode="auto">
+          <a:xfrm>
+            <a:off x="3384782" y="4283151"/>
+            <a:ext cx="2243137" cy="276999"/>
+          </a:xfrm>
+          <a:prstGeom prst="rect">
+            <a:avLst/>
+          </a:prstGeom>
+          <a:noFill/>
+          <a:ln>
+            <a:noFill/>
+          </a:ln>
+          <a:extLst>
+            <a:ext uri="{909E8E84-426E-40DD-AFC4-6F175D3DCCD1}">
+              <a14:hiddenFill xmlns:a14="http://schemas.microsoft.com/office/drawing/2010/main">
+                <a:solidFill>
+                  <a:srgbClr val="FFFFFF"/>
+                </a:solidFill>
+              </a14:hiddenFill>
+            </a:ext>
+            <a:ext uri="{91240B29-F687-4F45-9708-019B960494DF}">
+              <a14:hiddenLine xmlns:a14="http://schemas.microsoft.com/office/drawing/2010/main" w="9525">
+                <a:solidFill>
+                  <a:srgbClr val="000000"/>
+                </a:solidFill>
+                <a:miter lim="800000"/>
+                <a:headEnd/>
+                <a:tailEnd/>
+              </a14:hiddenLine>
+            </a:ext>
+          </a:extLst>
+        </p:spPr>
+        <p:txBody>
+          <a:bodyPr>
+            <a:spAutoFit/>
+          </a:bodyPr>
+          <a:lstStyle>
+            <a:lvl1pPr>
+              <a:defRPr>
+                <a:solidFill>
+                  <a:schemeClr val="tx1"/>
+                </a:solidFill>
+                <a:latin typeface="Calibri" panose="020F0502020204030204" pitchFamily="34" charset="0"/>
+              </a:defRPr>
+            </a:lvl1pPr>
+            <a:lvl2pPr marL="742950" indent="-285750">
+              <a:defRPr>
+                <a:solidFill>
+                  <a:schemeClr val="tx1"/>
+                </a:solidFill>
+                <a:latin typeface="Calibri" panose="020F0502020204030204" pitchFamily="34" charset="0"/>
+              </a:defRPr>
+            </a:lvl2pPr>
+            <a:lvl3pPr marL="1143000" indent="-228600">
+              <a:defRPr>
+                <a:solidFill>
+                  <a:schemeClr val="tx1"/>
+                </a:solidFill>
+                <a:latin typeface="Calibri" panose="020F0502020204030204" pitchFamily="34" charset="0"/>
+              </a:defRPr>
+            </a:lvl3pPr>
+            <a:lvl4pPr marL="1600200" indent="-228600">
+              <a:defRPr>
+                <a:solidFill>
+                  <a:schemeClr val="tx1"/>
+                </a:solidFill>
+                <a:latin typeface="Calibri" panose="020F0502020204030204" pitchFamily="34" charset="0"/>
+              </a:defRPr>
+            </a:lvl4pPr>
+            <a:lvl5pPr marL="2057400" indent="-228600">
+              <a:defRPr>
+                <a:solidFill>
+                  <a:schemeClr val="tx1"/>
+                </a:solidFill>
+                <a:latin typeface="Calibri" panose="020F0502020204030204" pitchFamily="34" charset="0"/>
+              </a:defRPr>
+            </a:lvl5pPr>
+            <a:lvl6pPr marL="2514600" indent="-228600" eaLnBrk="0" fontAlgn="base" hangingPunct="0">
+              <a:spcBef>
+                <a:spcPct val="0"/>
+              </a:spcBef>
+              <a:spcAft>
+                <a:spcPct val="0"/>
+              </a:spcAft>
+              <a:defRPr>
+                <a:solidFill>
+                  <a:schemeClr val="tx1"/>
+                </a:solidFill>
+                <a:latin typeface="Calibri" panose="020F0502020204030204" pitchFamily="34" charset="0"/>
+              </a:defRPr>
+            </a:lvl6pPr>
+            <a:lvl7pPr marL="2971800" indent="-228600" eaLnBrk="0" fontAlgn="base" hangingPunct="0">
+              <a:spcBef>
+                <a:spcPct val="0"/>
+              </a:spcBef>
+              <a:spcAft>
+                <a:spcPct val="0"/>
+              </a:spcAft>
+              <a:defRPr>
+                <a:solidFill>
+                  <a:schemeClr val="tx1"/>
+                </a:solidFill>
+                <a:latin typeface="Calibri" panose="020F0502020204030204" pitchFamily="34" charset="0"/>
+              </a:defRPr>
+            </a:lvl7pPr>
+            <a:lvl8pPr marL="3429000" indent="-228600" eaLnBrk="0" fontAlgn="base" hangingPunct="0">
+              <a:spcBef>
+                <a:spcPct val="0"/>
+              </a:spcBef>
+              <a:spcAft>
+                <a:spcPct val="0"/>
+              </a:spcAft>
+              <a:defRPr>
+                <a:solidFill>
+                  <a:schemeClr val="tx1"/>
+                </a:solidFill>
+                <a:latin typeface="Calibri" panose="020F0502020204030204" pitchFamily="34" charset="0"/>
+              </a:defRPr>
+            </a:lvl8pPr>
+            <a:lvl9pPr marL="3886200" indent="-228600" eaLnBrk="0" fontAlgn="base" hangingPunct="0">
+              <a:spcBef>
+                <a:spcPct val="0"/>
+              </a:spcBef>
+              <a:spcAft>
+                <a:spcPct val="0"/>
+              </a:spcAft>
+              <a:defRPr>
+                <a:solidFill>
+                  <a:schemeClr val="tx1"/>
+                </a:solidFill>
+                <a:latin typeface="Calibri" panose="020F0502020204030204" pitchFamily="34" charset="0"/>
+              </a:defRPr>
+            </a:lvl9pPr>
+          </a:lstStyle>
+          <a:p>
+            <a:pPr algn="ctr" eaLnBrk="1" hangingPunct="1"/>
+            <a:r>
+              <a:rPr lang="en-US" altLang="en-US" sz="1200" dirty="0">
+                <a:latin typeface="Arial" panose="020B0604020202020204" pitchFamily="34" charset="0"/>
+                <a:ea typeface="Amazon Ember" panose="020B0603020204020204" pitchFamily="34" charset="0"/>
+                <a:cs typeface="Arial" panose="020B0604020202020204" pitchFamily="34" charset="0"/>
+              </a:rPr>
+              <a:t>Amazon API Gateway</a:t>
+            </a:r>
+          </a:p>
+        </p:txBody>
+      </p:sp>
+      <p:pic>
+        <p:nvPicPr>
+          <p:cNvPr id="10" name="Graphic 8" descr="Amazon Simple Storage Service (Amazon S3) service icon.">
+            <a:extLst>
+              <a:ext uri="{FF2B5EF4-FFF2-40B4-BE49-F238E27FC236}">
+                <a16:creationId xmlns:a16="http://schemas.microsoft.com/office/drawing/2014/main" id="{566712FB-C681-3177-DB29-509D90BDDBD2}"/>
+              </a:ext>
+            </a:extLst>
+          </p:cNvPr>
+          <p:cNvPicPr>
+            <a:picLocks noChangeAspect="1" noChangeArrowheads="1"/>
+          </p:cNvPicPr>
+          <p:nvPr/>
+        </p:nvPicPr>
+        <p:blipFill>
+          <a:blip r:embed="rId8">
+            <a:extLst>
+              <a:ext uri="{96DAC541-7B7A-43D3-8B79-37D633B846F1}">
+                <asvg:svgBlip xmlns:asvg="http://schemas.microsoft.com/office/drawing/2016/SVG/main" r:embed="rId9"/>
+              </a:ext>
+            </a:extLst>
+          </a:blip>
+          <a:srcRect/>
+          <a:stretch/>
+        </p:blipFill>
+        <p:spPr bwMode="auto">
+          <a:xfrm>
+            <a:off x="8292936" y="3573017"/>
+            <a:ext cx="762000" cy="762000"/>
+          </a:xfrm>
+          <a:prstGeom prst="rect">
+            <a:avLst/>
+          </a:prstGeom>
+          <a:noFill/>
+          <a:ln>
+            <a:noFill/>
+          </a:ln>
+          <a:extLst>
+            <a:ext uri="{909E8E84-426E-40DD-AFC4-6F175D3DCCD1}">
+              <a14:hiddenFill xmlns:a14="http://schemas.microsoft.com/office/drawing/2010/main">
+                <a:solidFill>
+                  <a:srgbClr val="FFFFFF"/>
+                </a:solidFill>
+              </a14:hiddenFill>
+            </a:ext>
+            <a:ext uri="{91240B29-F687-4F45-9708-019B960494DF}">
+              <a14:hiddenLine xmlns:a14="http://schemas.microsoft.com/office/drawing/2010/main" w="9525">
+                <a:solidFill>
+                  <a:srgbClr val="000000"/>
+                </a:solidFill>
+                <a:miter lim="800000"/>
+                <a:headEnd/>
+                <a:tailEnd/>
+              </a14:hiddenLine>
+            </a:ext>
+          </a:extLst>
+        </p:spPr>
+      </p:pic>
+      <p:sp>
+        <p:nvSpPr>
+          <p:cNvPr id="15" name="TextBox 9">
+            <a:extLst>
+              <a:ext uri="{FF2B5EF4-FFF2-40B4-BE49-F238E27FC236}">
+                <a16:creationId xmlns:a16="http://schemas.microsoft.com/office/drawing/2014/main" id="{2A2F39F9-0789-22AF-7C3F-23741F7D4410}"/>
+              </a:ext>
+            </a:extLst>
+          </p:cNvPr>
+          <p:cNvSpPr txBox="1">
+            <a:spLocks noChangeArrowheads="1"/>
+          </p:cNvSpPr>
+          <p:nvPr/>
+        </p:nvSpPr>
+        <p:spPr bwMode="auto">
+          <a:xfrm>
+            <a:off x="7553161" y="4336604"/>
+            <a:ext cx="2239962" cy="461665"/>
+          </a:xfrm>
+          <a:prstGeom prst="rect">
+            <a:avLst/>
+          </a:prstGeom>
+          <a:noFill/>
+          <a:ln>
+            <a:noFill/>
+          </a:ln>
+          <a:extLst>
+            <a:ext uri="{909E8E84-426E-40DD-AFC4-6F175D3DCCD1}">
+              <a14:hiddenFill xmlns:a14="http://schemas.microsoft.com/office/drawing/2010/main">
+                <a:solidFill>
+                  <a:srgbClr val="FFFFFF"/>
+                </a:solidFill>
+              </a14:hiddenFill>
+            </a:ext>
+            <a:ext uri="{91240B29-F687-4F45-9708-019B960494DF}">
+              <a14:hiddenLine xmlns:a14="http://schemas.microsoft.com/office/drawing/2010/main" w="9525">
+                <a:solidFill>
+                  <a:srgbClr val="000000"/>
+                </a:solidFill>
+                <a:miter lim="800000"/>
+                <a:headEnd/>
+                <a:tailEnd/>
+              </a14:hiddenLine>
+            </a:ext>
+          </a:extLst>
+        </p:spPr>
+        <p:txBody>
+          <a:bodyPr>
+            <a:spAutoFit/>
+          </a:bodyPr>
+          <a:lstStyle>
+            <a:lvl1pPr>
+              <a:defRPr>
+                <a:solidFill>
+                  <a:schemeClr val="tx1"/>
+                </a:solidFill>
+                <a:latin typeface="Calibri" panose="020F0502020204030204" pitchFamily="34" charset="0"/>
+              </a:defRPr>
+            </a:lvl1pPr>
+            <a:lvl2pPr marL="742950" indent="-285750">
+              <a:defRPr>
+                <a:solidFill>
+                  <a:schemeClr val="tx1"/>
+                </a:solidFill>
+                <a:latin typeface="Calibri" panose="020F0502020204030204" pitchFamily="34" charset="0"/>
+              </a:defRPr>
+            </a:lvl2pPr>
+            <a:lvl3pPr marL="1143000" indent="-228600">
+              <a:defRPr>
+                <a:solidFill>
+                  <a:schemeClr val="tx1"/>
+                </a:solidFill>
+                <a:latin typeface="Calibri" panose="020F0502020204030204" pitchFamily="34" charset="0"/>
+              </a:defRPr>
+            </a:lvl3pPr>
+            <a:lvl4pPr marL="1600200" indent="-228600">
+              <a:defRPr>
+                <a:solidFill>
+                  <a:schemeClr val="tx1"/>
+                </a:solidFill>
+                <a:latin typeface="Calibri" panose="020F0502020204030204" pitchFamily="34" charset="0"/>
+              </a:defRPr>
+            </a:lvl4pPr>
+            <a:lvl5pPr marL="2057400" indent="-228600">
+              <a:defRPr>
+                <a:solidFill>
+                  <a:schemeClr val="tx1"/>
+                </a:solidFill>
+                <a:latin typeface="Calibri" panose="020F0502020204030204" pitchFamily="34" charset="0"/>
+              </a:defRPr>
+            </a:lvl5pPr>
+            <a:lvl6pPr marL="2514600" indent="-228600" eaLnBrk="0" fontAlgn="base" hangingPunct="0">
+              <a:spcBef>
+                <a:spcPct val="0"/>
+              </a:spcBef>
+              <a:spcAft>
+                <a:spcPct val="0"/>
+              </a:spcAft>
+              <a:defRPr>
+                <a:solidFill>
+                  <a:schemeClr val="tx1"/>
+                </a:solidFill>
+                <a:latin typeface="Calibri" panose="020F0502020204030204" pitchFamily="34" charset="0"/>
+              </a:defRPr>
+            </a:lvl6pPr>
+            <a:lvl7pPr marL="2971800" indent="-228600" eaLnBrk="0" fontAlgn="base" hangingPunct="0">
+              <a:spcBef>
+                <a:spcPct val="0"/>
+              </a:spcBef>
+              <a:spcAft>
+                <a:spcPct val="0"/>
+              </a:spcAft>
+              <a:defRPr>
+                <a:solidFill>
+                  <a:schemeClr val="tx1"/>
+                </a:solidFill>
+                <a:latin typeface="Calibri" panose="020F0502020204030204" pitchFamily="34" charset="0"/>
+              </a:defRPr>
+            </a:lvl7pPr>
+            <a:lvl8pPr marL="3429000" indent="-228600" eaLnBrk="0" fontAlgn="base" hangingPunct="0">
+              <a:spcBef>
+                <a:spcPct val="0"/>
+              </a:spcBef>
+              <a:spcAft>
+                <a:spcPct val="0"/>
+              </a:spcAft>
+              <a:defRPr>
+                <a:solidFill>
+                  <a:schemeClr val="tx1"/>
+                </a:solidFill>
+                <a:latin typeface="Calibri" panose="020F0502020204030204" pitchFamily="34" charset="0"/>
+              </a:defRPr>
+            </a:lvl8pPr>
+            <a:lvl9pPr marL="3886200" indent="-228600" eaLnBrk="0" fontAlgn="base" hangingPunct="0">
+              <a:spcBef>
+                <a:spcPct val="0"/>
+              </a:spcBef>
+              <a:spcAft>
+                <a:spcPct val="0"/>
+              </a:spcAft>
+              <a:defRPr>
+                <a:solidFill>
+                  <a:schemeClr val="tx1"/>
+                </a:solidFill>
+                <a:latin typeface="Calibri" panose="020F0502020204030204" pitchFamily="34" charset="0"/>
+              </a:defRPr>
+            </a:lvl9pPr>
+          </a:lstStyle>
+          <a:p>
+            <a:pPr algn="ctr" eaLnBrk="1" hangingPunct="1"/>
+            <a:r>
+              <a:rPr lang="en-US" altLang="en-US" sz="1200" dirty="0">
+                <a:latin typeface="Arial" panose="020B0604020202020204" pitchFamily="34" charset="0"/>
+                <a:ea typeface="Amazon Ember" panose="020B0603020204020204" pitchFamily="34" charset="0"/>
+                <a:cs typeface="Arial" panose="020B0604020202020204" pitchFamily="34" charset="0"/>
+              </a:rPr>
+              <a:t>Amazon Simple Storage Service (Amazon S3)</a:t>
+            </a:r>
+          </a:p>
+        </p:txBody>
+      </p:sp>
+      <p:pic>
+        <p:nvPicPr>
+          <p:cNvPr id="16" name="Graphic 10" descr="AWS Lambda service icon.">
+            <a:extLst>
+              <a:ext uri="{FF2B5EF4-FFF2-40B4-BE49-F238E27FC236}">
+                <a16:creationId xmlns:a16="http://schemas.microsoft.com/office/drawing/2014/main" id="{E84AA64E-CB23-2157-2F2A-A2083F20FD00}"/>
+              </a:ext>
+            </a:extLst>
+          </p:cNvPr>
+          <p:cNvPicPr>
+            <a:picLocks noChangeAspect="1" noChangeArrowheads="1"/>
+          </p:cNvPicPr>
+          <p:nvPr/>
+        </p:nvPicPr>
+        <p:blipFill>
+          <a:blip r:embed="rId10">
+            <a:extLst>
+              <a:ext uri="{96DAC541-7B7A-43D3-8B79-37D633B846F1}">
+                <asvg:svgBlip xmlns:asvg="http://schemas.microsoft.com/office/drawing/2016/SVG/main" r:embed="rId11"/>
+              </a:ext>
+            </a:extLst>
+          </a:blip>
+          <a:srcRect/>
+          <a:stretch/>
+        </p:blipFill>
+        <p:spPr bwMode="auto">
+          <a:xfrm>
+            <a:off x="6183083" y="3519948"/>
+            <a:ext cx="762000" cy="762000"/>
+          </a:xfrm>
+          <a:prstGeom prst="rect">
+            <a:avLst/>
+          </a:prstGeom>
+          <a:noFill/>
+          <a:ln>
+            <a:noFill/>
+          </a:ln>
+          <a:extLst>
+            <a:ext uri="{909E8E84-426E-40DD-AFC4-6F175D3DCCD1}">
+              <a14:hiddenFill xmlns:a14="http://schemas.microsoft.com/office/drawing/2010/main">
+                <a:solidFill>
+                  <a:srgbClr val="FFFFFF"/>
+                </a:solidFill>
+              </a14:hiddenFill>
+            </a:ext>
+            <a:ext uri="{91240B29-F687-4F45-9708-019B960494DF}">
+              <a14:hiddenLine xmlns:a14="http://schemas.microsoft.com/office/drawing/2010/main" w="9525">
+                <a:solidFill>
+                  <a:srgbClr val="000000"/>
+                </a:solidFill>
+                <a:miter lim="800000"/>
+                <a:headEnd/>
+                <a:tailEnd/>
+              </a14:hiddenLine>
+            </a:ext>
+          </a:extLst>
+        </p:spPr>
+      </p:pic>
+      <p:sp>
+        <p:nvSpPr>
+          <p:cNvPr id="17" name="TextBox 20">
+            <a:extLst>
+              <a:ext uri="{FF2B5EF4-FFF2-40B4-BE49-F238E27FC236}">
+                <a16:creationId xmlns:a16="http://schemas.microsoft.com/office/drawing/2014/main" id="{F9747CF0-7667-1573-5C73-D7A55822A6C4}"/>
+              </a:ext>
+            </a:extLst>
+          </p:cNvPr>
+          <p:cNvSpPr txBox="1">
+            <a:spLocks noChangeArrowheads="1"/>
+          </p:cNvSpPr>
+          <p:nvPr/>
+        </p:nvSpPr>
+        <p:spPr bwMode="auto">
+          <a:xfrm>
+            <a:off x="5442409" y="4281948"/>
+            <a:ext cx="2292350" cy="276999"/>
+          </a:xfrm>
+          <a:prstGeom prst="rect">
+            <a:avLst/>
+          </a:prstGeom>
+          <a:noFill/>
+          <a:ln>
+            <a:noFill/>
+          </a:ln>
+          <a:extLst>
+            <a:ext uri="{909E8E84-426E-40DD-AFC4-6F175D3DCCD1}">
+              <a14:hiddenFill xmlns:a14="http://schemas.microsoft.com/office/drawing/2010/main">
+                <a:solidFill>
+                  <a:srgbClr val="FFFFFF"/>
+                </a:solidFill>
+              </a14:hiddenFill>
+            </a:ext>
+            <a:ext uri="{91240B29-F687-4F45-9708-019B960494DF}">
+              <a14:hiddenLine xmlns:a14="http://schemas.microsoft.com/office/drawing/2010/main" w="9525">
+                <a:solidFill>
+                  <a:srgbClr val="000000"/>
+                </a:solidFill>
+                <a:miter lim="800000"/>
+                <a:headEnd/>
+                <a:tailEnd/>
+              </a14:hiddenLine>
+            </a:ext>
+          </a:extLst>
+        </p:spPr>
+        <p:txBody>
+          <a:bodyPr>
+            <a:spAutoFit/>
+          </a:bodyPr>
+          <a:lstStyle>
+            <a:lvl1pPr>
+              <a:defRPr>
+                <a:solidFill>
+                  <a:schemeClr val="tx1"/>
+                </a:solidFill>
+                <a:latin typeface="Calibri" panose="020F0502020204030204" pitchFamily="34" charset="0"/>
+              </a:defRPr>
+            </a:lvl1pPr>
+            <a:lvl2pPr marL="742950" indent="-285750">
+              <a:defRPr>
+                <a:solidFill>
+                  <a:schemeClr val="tx1"/>
+                </a:solidFill>
+                <a:latin typeface="Calibri" panose="020F0502020204030204" pitchFamily="34" charset="0"/>
+              </a:defRPr>
+            </a:lvl2pPr>
+            <a:lvl3pPr marL="1143000" indent="-228600">
+              <a:defRPr>
+                <a:solidFill>
+                  <a:schemeClr val="tx1"/>
+                </a:solidFill>
+                <a:latin typeface="Calibri" panose="020F0502020204030204" pitchFamily="34" charset="0"/>
+              </a:defRPr>
+            </a:lvl3pPr>
+            <a:lvl4pPr marL="1600200" indent="-228600">
+              <a:defRPr>
+                <a:solidFill>
+                  <a:schemeClr val="tx1"/>
+                </a:solidFill>
+                <a:latin typeface="Calibri" panose="020F0502020204030204" pitchFamily="34" charset="0"/>
+              </a:defRPr>
+            </a:lvl4pPr>
+            <a:lvl5pPr marL="2057400" indent="-228600">
+              <a:defRPr>
+                <a:solidFill>
+                  <a:schemeClr val="tx1"/>
+                </a:solidFill>
+                <a:latin typeface="Calibri" panose="020F0502020204030204" pitchFamily="34" charset="0"/>
+              </a:defRPr>
+            </a:lvl5pPr>
+            <a:lvl6pPr marL="2514600" indent="-228600" eaLnBrk="0" fontAlgn="base" hangingPunct="0">
+              <a:spcBef>
+                <a:spcPct val="0"/>
+              </a:spcBef>
+              <a:spcAft>
+                <a:spcPct val="0"/>
+              </a:spcAft>
+              <a:defRPr>
+                <a:solidFill>
+                  <a:schemeClr val="tx1"/>
+                </a:solidFill>
+                <a:latin typeface="Calibri" panose="020F0502020204030204" pitchFamily="34" charset="0"/>
+              </a:defRPr>
+            </a:lvl6pPr>
+            <a:lvl7pPr marL="2971800" indent="-228600" eaLnBrk="0" fontAlgn="base" hangingPunct="0">
+              <a:spcBef>
+                <a:spcPct val="0"/>
+              </a:spcBef>
+              <a:spcAft>
+                <a:spcPct val="0"/>
+              </a:spcAft>
+              <a:defRPr>
+                <a:solidFill>
+                  <a:schemeClr val="tx1"/>
+                </a:solidFill>
+                <a:latin typeface="Calibri" panose="020F0502020204030204" pitchFamily="34" charset="0"/>
+              </a:defRPr>
+            </a:lvl7pPr>
+            <a:lvl8pPr marL="3429000" indent="-228600" eaLnBrk="0" fontAlgn="base" hangingPunct="0">
+              <a:spcBef>
+                <a:spcPct val="0"/>
+              </a:spcBef>
+              <a:spcAft>
+                <a:spcPct val="0"/>
+              </a:spcAft>
+              <a:defRPr>
+                <a:solidFill>
+                  <a:schemeClr val="tx1"/>
+                </a:solidFill>
+                <a:latin typeface="Calibri" panose="020F0502020204030204" pitchFamily="34" charset="0"/>
+              </a:defRPr>
+            </a:lvl8pPr>
+            <a:lvl9pPr marL="3886200" indent="-228600" eaLnBrk="0" fontAlgn="base" hangingPunct="0">
+              <a:spcBef>
+                <a:spcPct val="0"/>
+              </a:spcBef>
+              <a:spcAft>
+                <a:spcPct val="0"/>
+              </a:spcAft>
+              <a:defRPr>
+                <a:solidFill>
+                  <a:schemeClr val="tx1"/>
+                </a:solidFill>
+                <a:latin typeface="Calibri" panose="020F0502020204030204" pitchFamily="34" charset="0"/>
+              </a:defRPr>
+            </a:lvl9pPr>
+          </a:lstStyle>
+          <a:p>
+            <a:pPr algn="ctr" eaLnBrk="1" hangingPunct="1"/>
+            <a:r>
+              <a:rPr lang="en-US" altLang="en-US" sz="1200" dirty="0">
+                <a:latin typeface="Arial" panose="020B0604020202020204" pitchFamily="34" charset="0"/>
+                <a:ea typeface="Amazon Ember" panose="020B0603020204020204" pitchFamily="34" charset="0"/>
+                <a:cs typeface="Arial" panose="020B0604020202020204" pitchFamily="34" charset="0"/>
+              </a:rPr>
+              <a:t>AWS Lambda</a:t>
+            </a:r>
+          </a:p>
+        </p:txBody>
+      </p:sp>
+      <p:pic>
+        <p:nvPicPr>
+          <p:cNvPr id="18" name="Graphic 19" descr="AWS Identity and Access Management (IAM) service icon.">
+            <a:extLst>
+              <a:ext uri="{FF2B5EF4-FFF2-40B4-BE49-F238E27FC236}">
+                <a16:creationId xmlns:a16="http://schemas.microsoft.com/office/drawing/2014/main" id="{C55B3D19-7927-4036-A51E-54D2269146C6}"/>
+              </a:ext>
+            </a:extLst>
+          </p:cNvPr>
+          <p:cNvPicPr>
+            <a:picLocks noChangeAspect="1" noChangeArrowheads="1"/>
+          </p:cNvPicPr>
+          <p:nvPr/>
+        </p:nvPicPr>
+        <p:blipFill>
+          <a:blip r:embed="rId12">
+            <a:extLst>
+              <a:ext uri="{96DAC541-7B7A-43D3-8B79-37D633B846F1}">
+                <asvg:svgBlip xmlns:asvg="http://schemas.microsoft.com/office/drawing/2016/SVG/main" r:embed="rId13"/>
+              </a:ext>
+            </a:extLst>
+          </a:blip>
+          <a:srcRect/>
+          <a:stretch/>
+        </p:blipFill>
+        <p:spPr bwMode="auto">
+          <a:xfrm>
+            <a:off x="6191709" y="1638977"/>
+            <a:ext cx="762000" cy="762000"/>
+          </a:xfrm>
+          <a:prstGeom prst="rect">
+            <a:avLst/>
+          </a:prstGeom>
+          <a:noFill/>
+          <a:ln>
+            <a:noFill/>
+          </a:ln>
+          <a:extLst>
+            <a:ext uri="{909E8E84-426E-40DD-AFC4-6F175D3DCCD1}">
+              <a14:hiddenFill xmlns:a14="http://schemas.microsoft.com/office/drawing/2010/main">
+                <a:solidFill>
+                  <a:srgbClr val="FFFFFF"/>
+                </a:solidFill>
+              </a14:hiddenFill>
+            </a:ext>
+            <a:ext uri="{91240B29-F687-4F45-9708-019B960494DF}">
+              <a14:hiddenLine xmlns:a14="http://schemas.microsoft.com/office/drawing/2010/main" w="9525">
+                <a:solidFill>
+                  <a:srgbClr val="000000"/>
+                </a:solidFill>
+                <a:miter lim="800000"/>
+                <a:headEnd/>
+                <a:tailEnd/>
+              </a14:hiddenLine>
+            </a:ext>
+          </a:extLst>
+        </p:spPr>
+      </p:pic>
+      <p:sp>
+        <p:nvSpPr>
+          <p:cNvPr id="19" name="TextBox 12">
+            <a:extLst>
+              <a:ext uri="{FF2B5EF4-FFF2-40B4-BE49-F238E27FC236}">
+                <a16:creationId xmlns:a16="http://schemas.microsoft.com/office/drawing/2014/main" id="{53BFE564-0BCC-787A-4EB7-9D8A3F82693F}"/>
+              </a:ext>
+            </a:extLst>
+          </p:cNvPr>
+          <p:cNvSpPr txBox="1">
+            <a:spLocks noChangeArrowheads="1"/>
+          </p:cNvSpPr>
+          <p:nvPr/>
+        </p:nvSpPr>
+        <p:spPr bwMode="auto">
+          <a:xfrm>
+            <a:off x="5442409" y="2400977"/>
+            <a:ext cx="2279650" cy="461665"/>
+          </a:xfrm>
+          <a:prstGeom prst="rect">
+            <a:avLst/>
+          </a:prstGeom>
+          <a:noFill/>
+          <a:ln>
+            <a:noFill/>
+          </a:ln>
+          <a:extLst>
+            <a:ext uri="{909E8E84-426E-40DD-AFC4-6F175D3DCCD1}">
+              <a14:hiddenFill xmlns:a14="http://schemas.microsoft.com/office/drawing/2010/main">
+                <a:solidFill>
+                  <a:srgbClr val="FFFFFF"/>
+                </a:solidFill>
+              </a14:hiddenFill>
+            </a:ext>
+            <a:ext uri="{91240B29-F687-4F45-9708-019B960494DF}">
+              <a14:hiddenLine xmlns:a14="http://schemas.microsoft.com/office/drawing/2010/main" w="9525">
+                <a:solidFill>
+                  <a:srgbClr val="000000"/>
+                </a:solidFill>
+                <a:miter lim="800000"/>
+                <a:headEnd/>
+                <a:tailEnd/>
+              </a14:hiddenLine>
+            </a:ext>
+          </a:extLst>
+        </p:spPr>
+        <p:txBody>
+          <a:bodyPr>
+            <a:spAutoFit/>
+          </a:bodyPr>
+          <a:lstStyle>
+            <a:lvl1pPr>
+              <a:defRPr>
+                <a:solidFill>
+                  <a:schemeClr val="tx1"/>
+                </a:solidFill>
+                <a:latin typeface="Calibri" panose="020F0502020204030204" pitchFamily="34" charset="0"/>
+              </a:defRPr>
+            </a:lvl1pPr>
+            <a:lvl2pPr marL="742950" indent="-285750">
+              <a:defRPr>
+                <a:solidFill>
+                  <a:schemeClr val="tx1"/>
+                </a:solidFill>
+                <a:latin typeface="Calibri" panose="020F0502020204030204" pitchFamily="34" charset="0"/>
+              </a:defRPr>
+            </a:lvl2pPr>
+            <a:lvl3pPr marL="1143000" indent="-228600">
+              <a:defRPr>
+                <a:solidFill>
+                  <a:schemeClr val="tx1"/>
+                </a:solidFill>
+                <a:latin typeface="Calibri" panose="020F0502020204030204" pitchFamily="34" charset="0"/>
+              </a:defRPr>
+            </a:lvl3pPr>
+            <a:lvl4pPr marL="1600200" indent="-228600">
+              <a:defRPr>
+                <a:solidFill>
+                  <a:schemeClr val="tx1"/>
+                </a:solidFill>
+                <a:latin typeface="Calibri" panose="020F0502020204030204" pitchFamily="34" charset="0"/>
+              </a:defRPr>
+            </a:lvl4pPr>
+            <a:lvl5pPr marL="2057400" indent="-228600">
+              <a:defRPr>
+                <a:solidFill>
+                  <a:schemeClr val="tx1"/>
+                </a:solidFill>
+                <a:latin typeface="Calibri" panose="020F0502020204030204" pitchFamily="34" charset="0"/>
+              </a:defRPr>
+            </a:lvl5pPr>
+            <a:lvl6pPr marL="2514600" indent="-228600" eaLnBrk="0" fontAlgn="base" hangingPunct="0">
+              <a:spcBef>
+                <a:spcPct val="0"/>
+              </a:spcBef>
+              <a:spcAft>
+                <a:spcPct val="0"/>
+              </a:spcAft>
+              <a:defRPr>
+                <a:solidFill>
+                  <a:schemeClr val="tx1"/>
+                </a:solidFill>
+                <a:latin typeface="Calibri" panose="020F0502020204030204" pitchFamily="34" charset="0"/>
+              </a:defRPr>
+            </a:lvl6pPr>
+            <a:lvl7pPr marL="2971800" indent="-228600" eaLnBrk="0" fontAlgn="base" hangingPunct="0">
+              <a:spcBef>
+                <a:spcPct val="0"/>
+              </a:spcBef>
+              <a:spcAft>
+                <a:spcPct val="0"/>
+              </a:spcAft>
+              <a:defRPr>
+                <a:solidFill>
+                  <a:schemeClr val="tx1"/>
+                </a:solidFill>
+                <a:latin typeface="Calibri" panose="020F0502020204030204" pitchFamily="34" charset="0"/>
+              </a:defRPr>
+            </a:lvl7pPr>
+            <a:lvl8pPr marL="3429000" indent="-228600" eaLnBrk="0" fontAlgn="base" hangingPunct="0">
+              <a:spcBef>
+                <a:spcPct val="0"/>
+              </a:spcBef>
+              <a:spcAft>
+                <a:spcPct val="0"/>
+              </a:spcAft>
+              <a:defRPr>
+                <a:solidFill>
+                  <a:schemeClr val="tx1"/>
+                </a:solidFill>
+                <a:latin typeface="Calibri" panose="020F0502020204030204" pitchFamily="34" charset="0"/>
+              </a:defRPr>
+            </a:lvl8pPr>
+            <a:lvl9pPr marL="3886200" indent="-228600" eaLnBrk="0" fontAlgn="base" hangingPunct="0">
+              <a:spcBef>
+                <a:spcPct val="0"/>
+              </a:spcBef>
+              <a:spcAft>
+                <a:spcPct val="0"/>
+              </a:spcAft>
+              <a:defRPr>
+                <a:solidFill>
+                  <a:schemeClr val="tx1"/>
+                </a:solidFill>
+                <a:latin typeface="Calibri" panose="020F0502020204030204" pitchFamily="34" charset="0"/>
+              </a:defRPr>
+            </a:lvl9pPr>
+          </a:lstStyle>
+          <a:p>
+            <a:pPr algn="ctr" eaLnBrk="1" hangingPunct="1"/>
+            <a:r>
+              <a:rPr lang="en-US" altLang="en-US" sz="1200" dirty="0">
+                <a:latin typeface="Arial" panose="020B0604020202020204" pitchFamily="34" charset="0"/>
+                <a:ea typeface="Amazon Ember" panose="020B0603020204020204" pitchFamily="34" charset="0"/>
+                <a:cs typeface="Arial" panose="020B0604020202020204" pitchFamily="34" charset="0"/>
+              </a:rPr>
+              <a:t>AWS Identity and Access Management (IAM)</a:t>
+            </a:r>
+          </a:p>
+        </p:txBody>
+      </p:sp>
+      <p:cxnSp>
+        <p:nvCxnSpPr>
+          <p:cNvPr id="23" name="Gerade Verbindung mit Pfeil 22">
+            <a:extLst>
+              <a:ext uri="{FF2B5EF4-FFF2-40B4-BE49-F238E27FC236}">
+                <a16:creationId xmlns:a16="http://schemas.microsoft.com/office/drawing/2014/main" id="{74010803-8823-B289-1C61-23648FAB601E}"/>
+              </a:ext>
+            </a:extLst>
+          </p:cNvPr>
+          <p:cNvCxnSpPr/>
+          <p:nvPr/>
+        </p:nvCxnSpPr>
+        <p:spPr>
+          <a:xfrm flipV="1">
+            <a:off x="2945872" y="3902151"/>
+            <a:ext cx="1065411" cy="7160"/>
+          </a:xfrm>
+          <a:prstGeom prst="straightConnector1">
+            <a:avLst/>
+          </a:prstGeom>
+          <a:ln w="6350">
+            <a:solidFill>
+              <a:schemeClr val="tx1"/>
+            </a:solidFill>
+            <a:headEnd type="arrow" w="med" len="med"/>
+            <a:tailEnd type="arrow" w="med" len="med"/>
+          </a:ln>
+        </p:spPr>
+        <p:style>
+          <a:lnRef idx="2">
+            <a:schemeClr val="accent1"/>
+          </a:lnRef>
+          <a:fillRef idx="0">
+            <a:schemeClr val="accent1"/>
+          </a:fillRef>
+          <a:effectRef idx="1">
+            <a:schemeClr val="accent1"/>
+          </a:effectRef>
+          <a:fontRef idx="minor">
+            <a:schemeClr val="tx1"/>
+          </a:fontRef>
+        </p:style>
+      </p:cxnSp>
+      <p:cxnSp>
+        <p:nvCxnSpPr>
+          <p:cNvPr id="24" name="Gerade Verbindung mit Pfeil 23">
+            <a:extLst>
+              <a:ext uri="{FF2B5EF4-FFF2-40B4-BE49-F238E27FC236}">
+                <a16:creationId xmlns:a16="http://schemas.microsoft.com/office/drawing/2014/main" id="{42B44D40-AB03-1D75-7DCF-92EB2F48F353}"/>
+              </a:ext>
+            </a:extLst>
+          </p:cNvPr>
+          <p:cNvCxnSpPr/>
+          <p:nvPr/>
+        </p:nvCxnSpPr>
+        <p:spPr>
+          <a:xfrm flipV="1">
+            <a:off x="4984528" y="3905334"/>
+            <a:ext cx="1065411" cy="7160"/>
+          </a:xfrm>
+          <a:prstGeom prst="straightConnector1">
+            <a:avLst/>
+          </a:prstGeom>
+          <a:ln w="6350">
+            <a:solidFill>
+              <a:schemeClr val="tx1"/>
+            </a:solidFill>
+            <a:headEnd type="arrow" w="med" len="med"/>
+            <a:tailEnd type="arrow" w="med" len="med"/>
+          </a:ln>
+        </p:spPr>
+        <p:style>
+          <a:lnRef idx="2">
+            <a:schemeClr val="accent1"/>
+          </a:lnRef>
+          <a:fillRef idx="0">
+            <a:schemeClr val="accent1"/>
+          </a:fillRef>
+          <a:effectRef idx="1">
+            <a:schemeClr val="accent1"/>
+          </a:effectRef>
+          <a:fontRef idx="minor">
+            <a:schemeClr val="tx1"/>
+          </a:fontRef>
+        </p:style>
+      </p:cxnSp>
+      <p:cxnSp>
+        <p:nvCxnSpPr>
+          <p:cNvPr id="29" name="Gerade Verbindung mit Pfeil 28">
+            <a:extLst>
+              <a:ext uri="{FF2B5EF4-FFF2-40B4-BE49-F238E27FC236}">
+                <a16:creationId xmlns:a16="http://schemas.microsoft.com/office/drawing/2014/main" id="{5270ABC0-CDFC-49DB-C1FB-7867DD30C05C}"/>
+              </a:ext>
+            </a:extLst>
+          </p:cNvPr>
+          <p:cNvCxnSpPr>
+            <a:cxnSpLocks/>
+          </p:cNvCxnSpPr>
+          <p:nvPr/>
+        </p:nvCxnSpPr>
+        <p:spPr>
+          <a:xfrm flipV="1">
+            <a:off x="6572709" y="2881223"/>
+            <a:ext cx="0" cy="547777"/>
+          </a:xfrm>
+          <a:prstGeom prst="straightConnector1">
+            <a:avLst/>
+          </a:prstGeom>
+          <a:ln w="6350">
+            <a:solidFill>
+              <a:schemeClr val="tx1"/>
+            </a:solidFill>
+            <a:headEnd type="arrow" w="med" len="med"/>
+            <a:tailEnd type="arrow" w="med" len="med"/>
+          </a:ln>
+        </p:spPr>
+        <p:style>
+          <a:lnRef idx="2">
+            <a:schemeClr val="accent1"/>
+          </a:lnRef>
+          <a:fillRef idx="0">
+            <a:schemeClr val="accent1"/>
+          </a:fillRef>
+          <a:effectRef idx="1">
+            <a:schemeClr val="accent1"/>
+          </a:effectRef>
+          <a:fontRef idx="minor">
+            <a:schemeClr val="tx1"/>
+          </a:fontRef>
+        </p:style>
+      </p:cxnSp>
+      <p:sp>
+        <p:nvSpPr>
+          <p:cNvPr id="44" name="Textfeld 43">
+            <a:extLst>
+              <a:ext uri="{FF2B5EF4-FFF2-40B4-BE49-F238E27FC236}">
+                <a16:creationId xmlns:a16="http://schemas.microsoft.com/office/drawing/2014/main" id="{E08CEE21-C37B-D4B4-BAF8-9A9C464D6406}"/>
+              </a:ext>
+            </a:extLst>
+          </p:cNvPr>
+          <p:cNvSpPr txBox="1"/>
+          <p:nvPr/>
+        </p:nvSpPr>
+        <p:spPr>
+          <a:xfrm>
+            <a:off x="3104497" y="3573017"/>
+            <a:ext cx="835485" cy="646331"/>
+          </a:xfrm>
+          <a:prstGeom prst="rect">
+            <a:avLst/>
+          </a:prstGeom>
+          <a:noFill/>
+          <a:ln w="6350">
+            <a:solidFill>
+              <a:schemeClr val="bg1"/>
+            </a:solidFill>
+          </a:ln>
+        </p:spPr>
+        <p:txBody>
+          <a:bodyPr wrap="none" rtlCol="0">
+            <a:spAutoFit/>
+          </a:bodyPr>
+          <a:lstStyle/>
+          <a:p>
+            <a:r>
+              <a:rPr lang="de-DE" sz="1200" dirty="0" err="1"/>
+              <a:t>request</a:t>
+            </a:r>
+            <a:endParaRPr lang="de-DE" sz="1200" dirty="0"/>
+          </a:p>
+          <a:p>
+            <a:endParaRPr lang="de-DE" sz="1200" dirty="0"/>
+          </a:p>
+          <a:p>
+            <a:r>
+              <a:rPr lang="de-DE" sz="1200" dirty="0" err="1"/>
+              <a:t>signed</a:t>
+            </a:r>
+            <a:r>
+              <a:rPr lang="de-DE" sz="1200" dirty="0"/>
+              <a:t> </a:t>
+            </a:r>
+            <a:r>
+              <a:rPr lang="de-DE" sz="1200" dirty="0" err="1"/>
+              <a:t>url</a:t>
+            </a:r>
+            <a:endParaRPr lang="de-CH" sz="1200" dirty="0"/>
+          </a:p>
+        </p:txBody>
+      </p:sp>
+      <p:sp>
+        <p:nvSpPr>
+          <p:cNvPr id="48" name="Textfeld 47">
+            <a:extLst>
+              <a:ext uri="{FF2B5EF4-FFF2-40B4-BE49-F238E27FC236}">
+                <a16:creationId xmlns:a16="http://schemas.microsoft.com/office/drawing/2014/main" id="{2AB3D54B-D056-A8AD-451E-A17ED6FE7574}"/>
+              </a:ext>
+            </a:extLst>
+          </p:cNvPr>
+          <p:cNvSpPr txBox="1"/>
+          <p:nvPr/>
+        </p:nvSpPr>
+        <p:spPr>
+          <a:xfrm>
+            <a:off x="5151214" y="3558429"/>
+            <a:ext cx="835485" cy="646331"/>
+          </a:xfrm>
+          <a:prstGeom prst="rect">
+            <a:avLst/>
+          </a:prstGeom>
+          <a:noFill/>
+        </p:spPr>
+        <p:txBody>
+          <a:bodyPr wrap="none" rtlCol="0">
+            <a:spAutoFit/>
+          </a:bodyPr>
+          <a:lstStyle/>
+          <a:p>
+            <a:r>
+              <a:rPr lang="de-DE" sz="1200" dirty="0" err="1"/>
+              <a:t>generate</a:t>
+            </a:r>
+            <a:endParaRPr lang="de-DE" sz="1200" dirty="0"/>
+          </a:p>
+          <a:p>
+            <a:endParaRPr lang="de-DE" sz="1200" dirty="0"/>
+          </a:p>
+          <a:p>
+            <a:r>
+              <a:rPr lang="de-DE" sz="1200" dirty="0" err="1"/>
+              <a:t>signed</a:t>
+            </a:r>
+            <a:r>
+              <a:rPr lang="de-DE" sz="1200" dirty="0"/>
+              <a:t> </a:t>
+            </a:r>
+            <a:r>
+              <a:rPr lang="de-DE" sz="1200" dirty="0" err="1"/>
+              <a:t>url</a:t>
+            </a:r>
+            <a:endParaRPr lang="de-CH" sz="1200" dirty="0"/>
+          </a:p>
+        </p:txBody>
+      </p:sp>
+      <p:sp>
+        <p:nvSpPr>
+          <p:cNvPr id="51" name="Textfeld 50">
+            <a:extLst>
+              <a:ext uri="{FF2B5EF4-FFF2-40B4-BE49-F238E27FC236}">
+                <a16:creationId xmlns:a16="http://schemas.microsoft.com/office/drawing/2014/main" id="{FD0C4435-1025-B558-B67B-07920FF1D1E0}"/>
+              </a:ext>
+            </a:extLst>
+          </p:cNvPr>
+          <p:cNvSpPr txBox="1"/>
+          <p:nvPr/>
+        </p:nvSpPr>
+        <p:spPr>
+          <a:xfrm>
+            <a:off x="6582234" y="2978467"/>
+            <a:ext cx="1472583" cy="276999"/>
+          </a:xfrm>
+          <a:prstGeom prst="rect">
+            <a:avLst/>
+          </a:prstGeom>
+          <a:noFill/>
+        </p:spPr>
+        <p:txBody>
+          <a:bodyPr wrap="none" rtlCol="0">
+            <a:spAutoFit/>
+          </a:bodyPr>
+          <a:lstStyle/>
+          <a:p>
+            <a:r>
+              <a:rPr lang="de-DE" sz="1200" dirty="0" err="1"/>
+              <a:t>provide</a:t>
+            </a:r>
+            <a:r>
+              <a:rPr lang="de-DE" sz="1200" dirty="0"/>
+              <a:t> </a:t>
+            </a:r>
+            <a:r>
+              <a:rPr lang="de-DE" sz="1200" dirty="0" err="1"/>
+              <a:t>access</a:t>
+            </a:r>
+            <a:r>
+              <a:rPr lang="de-DE" sz="1200" dirty="0"/>
+              <a:t> </a:t>
+            </a:r>
+            <a:r>
+              <a:rPr lang="de-DE" sz="1200" dirty="0" err="1"/>
+              <a:t>role</a:t>
+            </a:r>
+            <a:endParaRPr lang="de-DE" sz="1200" dirty="0"/>
+          </a:p>
+        </p:txBody>
+      </p:sp>
+      <p:cxnSp>
+        <p:nvCxnSpPr>
+          <p:cNvPr id="59" name="Verbinder: gewinkelt 58">
+            <a:extLst>
+              <a:ext uri="{FF2B5EF4-FFF2-40B4-BE49-F238E27FC236}">
+                <a16:creationId xmlns:a16="http://schemas.microsoft.com/office/drawing/2014/main" id="{5E3C1FF9-C92F-18E4-0DB8-3996B0DCF24B}"/>
+              </a:ext>
+            </a:extLst>
+          </p:cNvPr>
+          <p:cNvCxnSpPr>
+            <a:stCxn id="65" idx="2"/>
+            <a:endCxn id="15" idx="2"/>
+          </p:cNvCxnSpPr>
+          <p:nvPr/>
+        </p:nvCxnSpPr>
+        <p:spPr>
+          <a:xfrm rot="16200000" flipH="1">
+            <a:off x="5427453" y="1552579"/>
+            <a:ext cx="227533" cy="6263845"/>
+          </a:xfrm>
+          <a:prstGeom prst="bentConnector3">
+            <a:avLst>
+              <a:gd name="adj1" fmla="val 367285"/>
+            </a:avLst>
+          </a:prstGeom>
+          <a:ln w="6350">
+            <a:solidFill>
+              <a:schemeClr val="tx1"/>
+            </a:solidFill>
+            <a:headEnd type="arrow" w="med" len="med"/>
+            <a:tailEnd type="arrow" w="med" len="med"/>
+          </a:ln>
+        </p:spPr>
+        <p:style>
+          <a:lnRef idx="2">
+            <a:schemeClr val="accent1"/>
+          </a:lnRef>
+          <a:fillRef idx="0">
+            <a:schemeClr val="accent1"/>
+          </a:fillRef>
+          <a:effectRef idx="1">
+            <a:schemeClr val="accent1"/>
+          </a:effectRef>
+          <a:fontRef idx="minor">
+            <a:schemeClr val="tx1"/>
+          </a:fontRef>
+        </p:style>
+      </p:cxnSp>
+    </p:spTree>
+    <p:extLst>
+      <p:ext uri="{BB962C8B-B14F-4D97-AF65-F5344CB8AC3E}">
+        <p14:creationId xmlns:p14="http://schemas.microsoft.com/office/powerpoint/2010/main" val="1815640088"/>
+      </p:ext>
+    </p:extLst>
+  </p:cSld>
+  <p:clrMapOvr>
+    <a:masterClrMapping/>
+  </p:clrMapOvr>
+</p:sld>
+</file>
+
+<file path=ppt/slides/slide2.xml><?xml version="1.0" encoding="utf-8"?>
+<p:sld xmlns:a="http://schemas.openxmlformats.org/drawingml/2006/main" xmlns:r="http://schemas.openxmlformats.org/officeDocument/2006/relationships" xmlns:p="http://schemas.openxmlformats.org/presentationml/2006/main">
+  <p:cSld>
+    <p:spTree>
+      <p:nvGrpSpPr>
+        <p:cNvPr id="1" name=""/>
+        <p:cNvGrpSpPr/>
+        <p:nvPr/>
+      </p:nvGrpSpPr>
+      <p:grpSpPr>
+        <a:xfrm>
+          <a:off x="0" y="0"/>
+          <a:ext cx="0" cy="0"/>
+          <a:chOff x="0" y="0"/>
+          <a:chExt cx="0" cy="0"/>
+        </a:xfrm>
+      </p:grpSpPr>
+      <p:sp>
+        <p:nvSpPr>
+          <p:cNvPr id="5" name="Rectangle 54">
+            <a:extLst>
+              <a:ext uri="{FF2B5EF4-FFF2-40B4-BE49-F238E27FC236}">
+                <a16:creationId xmlns:a16="http://schemas.microsoft.com/office/drawing/2014/main" id="{302A5B0E-ABA9-48CD-84D0-B78867AD79EC}"/>
+              </a:ext>
+            </a:extLst>
+          </p:cNvPr>
+          <p:cNvSpPr/>
+          <p:nvPr/>
+        </p:nvSpPr>
+        <p:spPr>
+          <a:xfrm>
+            <a:off x="1335573" y="1110123"/>
+            <a:ext cx="9322902" cy="5081127"/>
+          </a:xfrm>
+          <a:prstGeom prst="rect">
+            <a:avLst/>
+          </a:prstGeom>
+          <a:noFill/>
+          <a:ln w="15875">
+            <a:solidFill>
+              <a:schemeClr val="tx1"/>
+            </a:solidFill>
+          </a:ln>
+        </p:spPr>
+        <p:style>
+          <a:lnRef idx="2">
+            <a:schemeClr val="accent1">
+              <a:shade val="50000"/>
+            </a:schemeClr>
+          </a:lnRef>
+          <a:fillRef idx="1">
+            <a:schemeClr val="accent1"/>
+          </a:fillRef>
+          <a:effectRef idx="0">
+            <a:schemeClr val="accent1"/>
+          </a:effectRef>
+          <a:fontRef idx="minor">
+            <a:schemeClr val="lt1"/>
+          </a:fontRef>
+        </p:style>
+        <p:txBody>
+          <a:bodyPr lIns="502920" tIns="91440"/>
+          <a:lstStyle>
+            <a:defPPr>
+              <a:defRPr lang="en-US"/>
+            </a:defPPr>
+            <a:lvl1pPr algn="l" rtl="0" eaLnBrk="0" fontAlgn="base" hangingPunct="0">
+              <a:spcBef>
+                <a:spcPct val="0"/>
+              </a:spcBef>
+              <a:spcAft>
+                <a:spcPct val="0"/>
+              </a:spcAft>
+              <a:defRPr kern="1200">
+                <a:solidFill>
+                  <a:schemeClr val="lt1"/>
+                </a:solidFill>
+                <a:latin typeface="+mn-lt"/>
+                <a:ea typeface="+mn-ea"/>
+                <a:cs typeface="+mn-cs"/>
+              </a:defRPr>
+            </a:lvl1pPr>
+            <a:lvl2pPr marL="457200" algn="l" rtl="0" eaLnBrk="0" fontAlgn="base" hangingPunct="0">
+              <a:spcBef>
+                <a:spcPct val="0"/>
+              </a:spcBef>
+              <a:spcAft>
+                <a:spcPct val="0"/>
+              </a:spcAft>
+              <a:defRPr kern="1200">
+                <a:solidFill>
+                  <a:schemeClr val="lt1"/>
+                </a:solidFill>
+                <a:latin typeface="+mn-lt"/>
+                <a:ea typeface="+mn-ea"/>
+                <a:cs typeface="+mn-cs"/>
+              </a:defRPr>
+            </a:lvl2pPr>
+            <a:lvl3pPr marL="914400" algn="l" rtl="0" eaLnBrk="0" fontAlgn="base" hangingPunct="0">
+              <a:spcBef>
+                <a:spcPct val="0"/>
+              </a:spcBef>
+              <a:spcAft>
+                <a:spcPct val="0"/>
+              </a:spcAft>
+              <a:defRPr kern="1200">
+                <a:solidFill>
+                  <a:schemeClr val="lt1"/>
+                </a:solidFill>
+                <a:latin typeface="+mn-lt"/>
+                <a:ea typeface="+mn-ea"/>
+                <a:cs typeface="+mn-cs"/>
+              </a:defRPr>
+            </a:lvl3pPr>
+            <a:lvl4pPr marL="1371600" algn="l" rtl="0" eaLnBrk="0" fontAlgn="base" hangingPunct="0">
+              <a:spcBef>
+                <a:spcPct val="0"/>
+              </a:spcBef>
+              <a:spcAft>
+                <a:spcPct val="0"/>
+              </a:spcAft>
+              <a:defRPr kern="1200">
+                <a:solidFill>
+                  <a:schemeClr val="lt1"/>
+                </a:solidFill>
+                <a:latin typeface="+mn-lt"/>
+                <a:ea typeface="+mn-ea"/>
+                <a:cs typeface="+mn-cs"/>
+              </a:defRPr>
+            </a:lvl4pPr>
+            <a:lvl5pPr marL="1828800" algn="l" rtl="0" eaLnBrk="0" fontAlgn="base" hangingPunct="0">
+              <a:spcBef>
+                <a:spcPct val="0"/>
+              </a:spcBef>
+              <a:spcAft>
+                <a:spcPct val="0"/>
+              </a:spcAft>
+              <a:defRPr kern="1200">
+                <a:solidFill>
+                  <a:schemeClr val="lt1"/>
+                </a:solidFill>
+                <a:latin typeface="+mn-lt"/>
+                <a:ea typeface="+mn-ea"/>
+                <a:cs typeface="+mn-cs"/>
+              </a:defRPr>
+            </a:lvl5pPr>
+            <a:lvl6pPr marL="2286000" algn="l" defTabSz="914400" rtl="0" eaLnBrk="1" latinLnBrk="0" hangingPunct="1">
+              <a:defRPr kern="1200">
+                <a:solidFill>
+                  <a:schemeClr val="lt1"/>
+                </a:solidFill>
+                <a:latin typeface="+mn-lt"/>
+                <a:ea typeface="+mn-ea"/>
+                <a:cs typeface="+mn-cs"/>
+              </a:defRPr>
+            </a:lvl6pPr>
+            <a:lvl7pPr marL="2743200" algn="l" defTabSz="914400" rtl="0" eaLnBrk="1" latinLnBrk="0" hangingPunct="1">
+              <a:defRPr kern="1200">
+                <a:solidFill>
+                  <a:schemeClr val="lt1"/>
+                </a:solidFill>
+                <a:latin typeface="+mn-lt"/>
+                <a:ea typeface="+mn-ea"/>
+                <a:cs typeface="+mn-cs"/>
+              </a:defRPr>
+            </a:lvl7pPr>
+            <a:lvl8pPr marL="3200400" algn="l" defTabSz="914400" rtl="0" eaLnBrk="1" latinLnBrk="0" hangingPunct="1">
+              <a:defRPr kern="1200">
+                <a:solidFill>
+                  <a:schemeClr val="lt1"/>
+                </a:solidFill>
+                <a:latin typeface="+mn-lt"/>
+                <a:ea typeface="+mn-ea"/>
+                <a:cs typeface="+mn-cs"/>
+              </a:defRPr>
+            </a:lvl8pPr>
+            <a:lvl9pPr marL="3657600" algn="l" defTabSz="914400" rtl="0" eaLnBrk="1" latinLnBrk="0" hangingPunct="1">
+              <a:defRPr kern="1200">
+                <a:solidFill>
+                  <a:schemeClr val="lt1"/>
+                </a:solidFill>
+                <a:latin typeface="+mn-lt"/>
+                <a:ea typeface="+mn-ea"/>
+                <a:cs typeface="+mn-cs"/>
+              </a:defRPr>
+            </a:lvl9pPr>
+          </a:lstStyle>
+          <a:p>
+            <a:pPr eaLnBrk="1" fontAlgn="auto" hangingPunct="1">
+              <a:spcBef>
+                <a:spcPts val="0"/>
+              </a:spcBef>
+              <a:spcAft>
+                <a:spcPts val="0"/>
+              </a:spcAft>
+              <a:defRPr/>
+            </a:pPr>
+            <a:endParaRPr lang="en-US" sz="1200" dirty="0">
+              <a:solidFill>
+                <a:schemeClr val="tx1"/>
+              </a:solidFill>
+              <a:latin typeface="Arial" panose="020B0604020202020204" pitchFamily="34" charset="0"/>
+              <a:cs typeface="Arial" panose="020B0604020202020204" pitchFamily="34" charset="0"/>
+            </a:endParaRPr>
+          </a:p>
+        </p:txBody>
+      </p:sp>
+      <p:pic>
+        <p:nvPicPr>
+          <p:cNvPr id="6" name="Graphic 55" descr="AWS Cloud group icon with AWS logo.">
+            <a:extLst>
+              <a:ext uri="{FF2B5EF4-FFF2-40B4-BE49-F238E27FC236}">
+                <a16:creationId xmlns:a16="http://schemas.microsoft.com/office/drawing/2014/main" id="{8AB2D835-9413-49FA-ACE8-763B2FFE233A}"/>
+              </a:ext>
+            </a:extLst>
+          </p:cNvPr>
+          <p:cNvPicPr>
+            <a:picLocks noChangeAspect="1"/>
+          </p:cNvPicPr>
+          <p:nvPr/>
+        </p:nvPicPr>
+        <p:blipFill>
+          <a:blip r:embed="rId2">
+            <a:extLst>
+              <a:ext uri="{96DAC541-7B7A-43D3-8B79-37D633B846F1}">
+                <asvg:svgBlip xmlns:asvg="http://schemas.microsoft.com/office/drawing/2016/SVG/main" r:embed="rId3"/>
+              </a:ext>
+            </a:extLst>
+          </a:blip>
+          <a:srcRect/>
+          <a:stretch/>
+        </p:blipFill>
+        <p:spPr>
+          <a:xfrm>
+            <a:off x="1335573" y="1110123"/>
             <a:ext cx="710227" cy="710227"/>
           </a:xfrm>
           <a:prstGeom prst="rect">
@@ -3581,7 +5415,7 @@
         </p:nvGrpSpPr>
         <p:grpSpPr>
           <a:xfrm>
-            <a:off x="5828081" y="2306000"/>
+            <a:off x="5828081" y="3056498"/>
             <a:ext cx="1585787" cy="2310257"/>
             <a:chOff x="5357286" y="1429893"/>
             <a:chExt cx="1585787" cy="2310257"/>
@@ -4422,7 +6256,7 @@
         </p:nvGrpSpPr>
         <p:grpSpPr>
           <a:xfrm>
-            <a:off x="8026375" y="2901482"/>
+            <a:off x="8026375" y="3651980"/>
             <a:ext cx="2010189" cy="1410309"/>
             <a:chOff x="7610179" y="1216809"/>
             <a:chExt cx="2010189" cy="1410309"/>
@@ -4941,7 +6775,7 @@
         </p:nvGrpSpPr>
         <p:grpSpPr>
           <a:xfrm>
-            <a:off x="5398166" y="792817"/>
+            <a:off x="5398166" y="1543315"/>
             <a:ext cx="2441631" cy="1040114"/>
             <a:chOff x="4476750" y="595995"/>
             <a:chExt cx="2441631" cy="1040114"/>
@@ -5738,7 +7572,7 @@
         </p:nvGrpSpPr>
         <p:grpSpPr>
           <a:xfrm>
-            <a:off x="3313721" y="2306000"/>
+            <a:off x="3313721" y="3056498"/>
             <a:ext cx="1710793" cy="2357786"/>
             <a:chOff x="2436272" y="1636364"/>
             <a:chExt cx="1710793" cy="2357786"/>
@@ -6635,7 +8469,7 @@
         </p:blipFill>
         <p:spPr bwMode="auto">
           <a:xfrm>
-            <a:off x="1557825" y="3229291"/>
+            <a:off x="1557825" y="3979789"/>
             <a:ext cx="457200" cy="457200"/>
           </a:xfrm>
           <a:prstGeom prst="rect">
@@ -6682,7 +8516,7 @@
         </p:nvSpPr>
         <p:spPr bwMode="auto">
           <a:xfrm>
-            <a:off x="1251741" y="3765066"/>
+            <a:off x="1251741" y="4515564"/>
             <a:ext cx="1073150" cy="215444"/>
           </a:xfrm>
           <a:prstGeom prst="rect">
@@ -6905,7 +8739,7 @@
         </p:blipFill>
         <p:spPr>
           <a:xfrm>
-            <a:off x="2146562" y="3236451"/>
+            <a:off x="2146562" y="3986949"/>
             <a:ext cx="457200" cy="457200"/>
           </a:xfrm>
           <a:prstGeom prst="rect">
@@ -6929,7 +8763,7 @@
         </p:nvSpPr>
         <p:spPr bwMode="auto">
           <a:xfrm>
-            <a:off x="1838587" y="3796380"/>
+            <a:off x="1838587" y="4546878"/>
             <a:ext cx="1073150" cy="215444"/>
           </a:xfrm>
           <a:prstGeom prst="rect">
@@ -7140,7 +8974,7 @@
         </p:nvCxnSpPr>
         <p:spPr>
           <a:xfrm rot="10800000" flipV="1">
-            <a:off x="2640662" y="3208490"/>
+            <a:off x="2640662" y="3958988"/>
             <a:ext cx="1210587" cy="204929"/>
           </a:xfrm>
           <a:prstGeom prst="bentConnector3">
@@ -7187,7 +9021,7 @@
         </p:nvCxnSpPr>
         <p:spPr>
           <a:xfrm>
-            <a:off x="2659530" y="3628862"/>
+            <a:off x="2659530" y="4379360"/>
             <a:ext cx="1177826" cy="310268"/>
           </a:xfrm>
           <a:prstGeom prst="bentConnector3">
@@ -7232,7 +9066,7 @@
         </p:nvCxnSpPr>
         <p:spPr>
           <a:xfrm>
-            <a:off x="4516619" y="3072490"/>
+            <a:off x="4516619" y="3822988"/>
             <a:ext cx="1799985" cy="0"/>
           </a:xfrm>
           <a:prstGeom prst="line">
@@ -7277,7 +9111,7 @@
         </p:nvCxnSpPr>
         <p:spPr>
           <a:xfrm>
-            <a:off x="4516618" y="3913172"/>
+            <a:off x="4516618" y="4663670"/>
             <a:ext cx="1799985" cy="0"/>
           </a:xfrm>
           <a:prstGeom prst="line">
@@ -7326,7 +9160,7 @@
         </p:nvCxnSpPr>
         <p:spPr>
           <a:xfrm rot="10800000" flipH="1" flipV="1">
-            <a:off x="5952163" y="1307778"/>
+            <a:off x="5952163" y="2058276"/>
             <a:ext cx="701119" cy="1569467"/>
           </a:xfrm>
           <a:prstGeom prst="bentConnector4">
@@ -7376,7 +9210,7 @@
         </p:nvCxnSpPr>
         <p:spPr>
           <a:xfrm flipH="1">
-            <a:off x="6678703" y="1315870"/>
+            <a:off x="6678703" y="2066368"/>
             <a:ext cx="596038" cy="2985882"/>
           </a:xfrm>
           <a:prstGeom prst="bentConnector4">
@@ -7426,7 +9260,7 @@
         </p:nvCxnSpPr>
         <p:spPr>
           <a:xfrm rot="16200000" flipH="1">
-            <a:off x="5698130" y="688855"/>
+            <a:off x="5698130" y="1439353"/>
             <a:ext cx="53561" cy="6699497"/>
           </a:xfrm>
           <a:prstGeom prst="bentConnector3">
@@ -7471,7 +9305,7 @@
         </p:nvSpPr>
         <p:spPr>
           <a:xfrm>
-            <a:off x="4760218" y="4812328"/>
+            <a:off x="4760218" y="5562826"/>
             <a:ext cx="1968809" cy="246221"/>
           </a:xfrm>
           <a:prstGeom prst="rect">
@@ -7514,6 +9348,46 @@
               <a:t>url</a:t>
             </a:r>
             <a:endParaRPr lang="de-CH" sz="1000" dirty="0"/>
+          </a:p>
+        </p:txBody>
+      </p:sp>
+      <p:sp>
+        <p:nvSpPr>
+          <p:cNvPr id="2" name="Textfeld 1">
+            <a:extLst>
+              <a:ext uri="{FF2B5EF4-FFF2-40B4-BE49-F238E27FC236}">
+                <a16:creationId xmlns:a16="http://schemas.microsoft.com/office/drawing/2014/main" id="{2C3369E3-DD22-6969-8543-7B86497C2EB5}"/>
+              </a:ext>
+            </a:extLst>
+          </p:cNvPr>
+          <p:cNvSpPr txBox="1"/>
+          <p:nvPr/>
+        </p:nvSpPr>
+        <p:spPr>
+          <a:xfrm>
+            <a:off x="4295490" y="547328"/>
+            <a:ext cx="2336794" cy="369332"/>
+          </a:xfrm>
+          <a:prstGeom prst="rect">
+            <a:avLst/>
+          </a:prstGeom>
+          <a:noFill/>
+        </p:spPr>
+        <p:txBody>
+          <a:bodyPr wrap="none" rtlCol="0">
+            <a:spAutoFit/>
+          </a:bodyPr>
+          <a:lstStyle/>
+          <a:p>
+            <a:r>
+              <a:rPr lang="de-DE" dirty="0"/>
+              <a:t>Architecture </a:t>
+            </a:r>
+            <a:r>
+              <a:rPr lang="de-DE" dirty="0" err="1"/>
+              <a:t>overview</a:t>
+            </a:r>
+            <a:endParaRPr lang="de-CH" dirty="0"/>
           </a:p>
         </p:txBody>
       </p:sp>

--- a/docu/AWS-Architecture.pptx
+++ b/docu/AWS-Architecture.pptx
@@ -6763,10 +6763,10 @@
       </p:grpSp>
       <p:grpSp>
         <p:nvGrpSpPr>
-          <p:cNvPr id="61" name="Gruppieren 60">
-            <a:extLst>
-              <a:ext uri="{FF2B5EF4-FFF2-40B4-BE49-F238E27FC236}">
-                <a16:creationId xmlns:a16="http://schemas.microsoft.com/office/drawing/2014/main" id="{B890A991-6237-AB72-8C95-B90DDA1F0A14}"/>
+          <p:cNvPr id="41" name="Gruppieren 40">
+            <a:extLst>
+              <a:ext uri="{FF2B5EF4-FFF2-40B4-BE49-F238E27FC236}">
+                <a16:creationId xmlns:a16="http://schemas.microsoft.com/office/drawing/2014/main" id="{01C02EA5-E3D5-81A1-2314-385AE1BF554A}"/>
               </a:ext>
             </a:extLst>
           </p:cNvPr>
@@ -6775,331 +6775,98 @@
         </p:nvGrpSpPr>
         <p:grpSpPr>
           <a:xfrm>
-            <a:off x="5398166" y="1543315"/>
-            <a:ext cx="2441631" cy="1040114"/>
-            <a:chOff x="4476750" y="595995"/>
-            <a:chExt cx="2441631" cy="1040114"/>
+            <a:off x="5531272" y="1882656"/>
+            <a:ext cx="1193023" cy="616862"/>
+            <a:chOff x="3453540" y="4723571"/>
+            <a:chExt cx="1193023" cy="616862"/>
           </a:xfrm>
         </p:grpSpPr>
-        <p:grpSp>
-          <p:nvGrpSpPr>
-            <p:cNvPr id="41" name="Gruppieren 40">
+        <p:pic>
+          <p:nvPicPr>
+            <p:cNvPr id="21" name="Graphic 72" descr="Role resource icon for the IAM service.">
               <a:extLst>
                 <a:ext uri="{FF2B5EF4-FFF2-40B4-BE49-F238E27FC236}">
-                  <a16:creationId xmlns:a16="http://schemas.microsoft.com/office/drawing/2014/main" id="{01C02EA5-E3D5-81A1-2314-385AE1BF554A}"/>
+                  <a16:creationId xmlns:a16="http://schemas.microsoft.com/office/drawing/2014/main" id="{26677775-3154-4096-8694-4B7358F3D16C}"/>
                 </a:ext>
               </a:extLst>
             </p:cNvPr>
-            <p:cNvGrpSpPr/>
+            <p:cNvPicPr>
+              <a:picLocks noChangeAspect="1"/>
+            </p:cNvPicPr>
             <p:nvPr/>
-          </p:nvGrpSpPr>
-          <p:grpSpPr>
-            <a:xfrm>
-              <a:off x="4609856" y="935336"/>
-              <a:ext cx="1193023" cy="616862"/>
-              <a:chOff x="3453540" y="4723571"/>
-              <a:chExt cx="1193023" cy="616862"/>
-            </a:xfrm>
-          </p:grpSpPr>
-          <p:pic>
-            <p:nvPicPr>
-              <p:cNvPr id="21" name="Graphic 72" descr="Role resource icon for the IAM service.">
-                <a:extLst>
-                  <a:ext uri="{FF2B5EF4-FFF2-40B4-BE49-F238E27FC236}">
-                    <a16:creationId xmlns:a16="http://schemas.microsoft.com/office/drawing/2014/main" id="{26677775-3154-4096-8694-4B7358F3D16C}"/>
-                  </a:ext>
-                </a:extLst>
-              </p:cNvPr>
-              <p:cNvPicPr>
-                <a:picLocks noChangeAspect="1"/>
-              </p:cNvPicPr>
-              <p:nvPr/>
-            </p:nvPicPr>
-            <p:blipFill>
-              <a:blip r:embed="rId12">
-                <a:extLst>
-                  <a:ext uri="{96DAC541-7B7A-43D3-8B79-37D633B846F1}">
-                    <asvg:svgBlip xmlns:asvg="http://schemas.microsoft.com/office/drawing/2016/SVG/main" r:embed="rId13"/>
-                  </a:ext>
-                </a:extLst>
-              </a:blip>
-              <a:stretch>
-                <a:fillRect/>
-              </a:stretch>
-            </p:blipFill>
-            <p:spPr>
-              <a:xfrm>
-                <a:off x="3874432" y="4723571"/>
-                <a:ext cx="351241" cy="351241"/>
-              </a:xfrm>
-              <a:prstGeom prst="rect">
-                <a:avLst/>
-              </a:prstGeom>
-            </p:spPr>
-          </p:pic>
-          <p:sp>
-            <p:nvSpPr>
-              <p:cNvPr id="22" name="TextBox 29">
-                <a:extLst>
-                  <a:ext uri="{FF2B5EF4-FFF2-40B4-BE49-F238E27FC236}">
-                    <a16:creationId xmlns:a16="http://schemas.microsoft.com/office/drawing/2014/main" id="{0F02AB39-166A-4382-8A27-57908748AFED}"/>
-                  </a:ext>
-                </a:extLst>
-              </p:cNvPr>
-              <p:cNvSpPr txBox="1">
-                <a:spLocks noChangeArrowheads="1"/>
-              </p:cNvSpPr>
-              <p:nvPr/>
-            </p:nvSpPr>
-            <p:spPr bwMode="auto">
-              <a:xfrm>
-                <a:off x="3453540" y="5001879"/>
-                <a:ext cx="1193023" cy="338554"/>
-              </a:xfrm>
-              <a:prstGeom prst="rect">
-                <a:avLst/>
-              </a:prstGeom>
-              <a:noFill/>
-              <a:ln>
-                <a:noFill/>
-              </a:ln>
+          </p:nvPicPr>
+          <p:blipFill>
+            <a:blip r:embed="rId12">
               <a:extLst>
-                <a:ext uri="{909E8E84-426E-40DD-AFC4-6F175D3DCCD1}">
-                  <a14:hiddenFill xmlns:a14="http://schemas.microsoft.com/office/drawing/2010/main">
-                    <a:solidFill>
-                      <a:srgbClr val="FFFFFF"/>
-                    </a:solidFill>
-                  </a14:hiddenFill>
-                </a:ext>
-                <a:ext uri="{91240B29-F687-4F45-9708-019B960494DF}">
-                  <a14:hiddenLine xmlns:a14="http://schemas.microsoft.com/office/drawing/2010/main" w="9525">
-                    <a:solidFill>
-                      <a:srgbClr val="000000"/>
-                    </a:solidFill>
-                    <a:miter lim="800000"/>
-                    <a:headEnd/>
-                    <a:tailEnd/>
-                  </a14:hiddenLine>
+                <a:ext uri="{96DAC541-7B7A-43D3-8B79-37D633B846F1}">
+                  <asvg:svgBlip xmlns:asvg="http://schemas.microsoft.com/office/drawing/2016/SVG/main" r:embed="rId13"/>
                 </a:ext>
               </a:extLst>
-            </p:spPr>
-            <p:txBody>
-              <a:bodyPr wrap="square">
-                <a:spAutoFit/>
-              </a:bodyPr>
-              <a:lstStyle>
-                <a:defPPr>
-                  <a:defRPr lang="en-US"/>
-                </a:defPPr>
-                <a:lvl1pPr algn="l" rtl="0" eaLnBrk="0" fontAlgn="base" hangingPunct="0">
-                  <a:spcBef>
-                    <a:spcPct val="0"/>
-                  </a:spcBef>
-                  <a:spcAft>
-                    <a:spcPct val="0"/>
-                  </a:spcAft>
-                  <a:defRPr kern="1200">
-                    <a:solidFill>
-                      <a:schemeClr val="tx1"/>
-                    </a:solidFill>
-                    <a:latin typeface="Calibri" panose="020F0502020204030204" pitchFamily="34" charset="0"/>
-                    <a:ea typeface="+mn-ea"/>
-                    <a:cs typeface="+mn-cs"/>
-                  </a:defRPr>
-                </a:lvl1pPr>
-                <a:lvl2pPr marL="742950" indent="-285750" algn="l" rtl="0" eaLnBrk="0" fontAlgn="base" hangingPunct="0">
-                  <a:spcBef>
-                    <a:spcPct val="0"/>
-                  </a:spcBef>
-                  <a:spcAft>
-                    <a:spcPct val="0"/>
-                  </a:spcAft>
-                  <a:defRPr kern="1200">
-                    <a:solidFill>
-                      <a:schemeClr val="tx1"/>
-                    </a:solidFill>
-                    <a:latin typeface="Calibri" panose="020F0502020204030204" pitchFamily="34" charset="0"/>
-                    <a:ea typeface="+mn-ea"/>
-                    <a:cs typeface="+mn-cs"/>
-                  </a:defRPr>
-                </a:lvl2pPr>
-                <a:lvl3pPr marL="1143000" indent="-228600" algn="l" rtl="0" eaLnBrk="0" fontAlgn="base" hangingPunct="0">
-                  <a:spcBef>
-                    <a:spcPct val="0"/>
-                  </a:spcBef>
-                  <a:spcAft>
-                    <a:spcPct val="0"/>
-                  </a:spcAft>
-                  <a:defRPr kern="1200">
-                    <a:solidFill>
-                      <a:schemeClr val="tx1"/>
-                    </a:solidFill>
-                    <a:latin typeface="Calibri" panose="020F0502020204030204" pitchFamily="34" charset="0"/>
-                    <a:ea typeface="+mn-ea"/>
-                    <a:cs typeface="+mn-cs"/>
-                  </a:defRPr>
-                </a:lvl3pPr>
-                <a:lvl4pPr marL="1600200" indent="-228600" algn="l" rtl="0" eaLnBrk="0" fontAlgn="base" hangingPunct="0">
-                  <a:spcBef>
-                    <a:spcPct val="0"/>
-                  </a:spcBef>
-                  <a:spcAft>
-                    <a:spcPct val="0"/>
-                  </a:spcAft>
-                  <a:defRPr kern="1200">
-                    <a:solidFill>
-                      <a:schemeClr val="tx1"/>
-                    </a:solidFill>
-                    <a:latin typeface="Calibri" panose="020F0502020204030204" pitchFamily="34" charset="0"/>
-                    <a:ea typeface="+mn-ea"/>
-                    <a:cs typeface="+mn-cs"/>
-                  </a:defRPr>
-                </a:lvl4pPr>
-                <a:lvl5pPr marL="2057400" indent="-228600" algn="l" rtl="0" eaLnBrk="0" fontAlgn="base" hangingPunct="0">
-                  <a:spcBef>
-                    <a:spcPct val="0"/>
-                  </a:spcBef>
-                  <a:spcAft>
-                    <a:spcPct val="0"/>
-                  </a:spcAft>
-                  <a:defRPr kern="1200">
-                    <a:solidFill>
-                      <a:schemeClr val="tx1"/>
-                    </a:solidFill>
-                    <a:latin typeface="Calibri" panose="020F0502020204030204" pitchFamily="34" charset="0"/>
-                    <a:ea typeface="+mn-ea"/>
-                    <a:cs typeface="+mn-cs"/>
-                  </a:defRPr>
-                </a:lvl5pPr>
-                <a:lvl6pPr marL="2514600" indent="-228600" algn="l" defTabSz="914400" rtl="0" eaLnBrk="0" fontAlgn="base" latinLnBrk="0" hangingPunct="0">
-                  <a:spcBef>
-                    <a:spcPct val="0"/>
-                  </a:spcBef>
-                  <a:spcAft>
-                    <a:spcPct val="0"/>
-                  </a:spcAft>
-                  <a:defRPr kern="1200">
-                    <a:solidFill>
-                      <a:schemeClr val="tx1"/>
-                    </a:solidFill>
-                    <a:latin typeface="Calibri" panose="020F0502020204030204" pitchFamily="34" charset="0"/>
-                    <a:ea typeface="+mn-ea"/>
-                    <a:cs typeface="+mn-cs"/>
-                  </a:defRPr>
-                </a:lvl6pPr>
-                <a:lvl7pPr marL="2971800" indent="-228600" algn="l" defTabSz="914400" rtl="0" eaLnBrk="0" fontAlgn="base" latinLnBrk="0" hangingPunct="0">
-                  <a:spcBef>
-                    <a:spcPct val="0"/>
-                  </a:spcBef>
-                  <a:spcAft>
-                    <a:spcPct val="0"/>
-                  </a:spcAft>
-                  <a:defRPr kern="1200">
-                    <a:solidFill>
-                      <a:schemeClr val="tx1"/>
-                    </a:solidFill>
-                    <a:latin typeface="Calibri" panose="020F0502020204030204" pitchFamily="34" charset="0"/>
-                    <a:ea typeface="+mn-ea"/>
-                    <a:cs typeface="+mn-cs"/>
-                  </a:defRPr>
-                </a:lvl7pPr>
-                <a:lvl8pPr marL="3429000" indent="-228600" algn="l" defTabSz="914400" rtl="0" eaLnBrk="0" fontAlgn="base" latinLnBrk="0" hangingPunct="0">
-                  <a:spcBef>
-                    <a:spcPct val="0"/>
-                  </a:spcBef>
-                  <a:spcAft>
-                    <a:spcPct val="0"/>
-                  </a:spcAft>
-                  <a:defRPr kern="1200">
-                    <a:solidFill>
-                      <a:schemeClr val="tx1"/>
-                    </a:solidFill>
-                    <a:latin typeface="Calibri" panose="020F0502020204030204" pitchFamily="34" charset="0"/>
-                    <a:ea typeface="+mn-ea"/>
-                    <a:cs typeface="+mn-cs"/>
-                  </a:defRPr>
-                </a:lvl8pPr>
-                <a:lvl9pPr marL="3886200" indent="-228600" algn="l" defTabSz="914400" rtl="0" eaLnBrk="0" fontAlgn="base" latinLnBrk="0" hangingPunct="0">
-                  <a:spcBef>
-                    <a:spcPct val="0"/>
-                  </a:spcBef>
-                  <a:spcAft>
-                    <a:spcPct val="0"/>
-                  </a:spcAft>
-                  <a:defRPr kern="1200">
-                    <a:solidFill>
-                      <a:schemeClr val="tx1"/>
-                    </a:solidFill>
-                    <a:latin typeface="Calibri" panose="020F0502020204030204" pitchFamily="34" charset="0"/>
-                    <a:ea typeface="+mn-ea"/>
-                    <a:cs typeface="+mn-cs"/>
-                  </a:defRPr>
-                </a:lvl9pPr>
-              </a:lstStyle>
-              <a:p>
-                <a:pPr algn="ctr" eaLnBrk="1" hangingPunct="1"/>
-                <a:r>
-                  <a:rPr lang="en-US" altLang="en-US" sz="800" dirty="0" err="1">
-                    <a:latin typeface="Arial" panose="020B0604020202020204" pitchFamily="34" charset="0"/>
-                    <a:ea typeface="Amazon Ember" panose="020B0603020204020204" pitchFamily="34" charset="0"/>
-                    <a:cs typeface="Arial" panose="020B0604020202020204" pitchFamily="34" charset="0"/>
-                  </a:rPr>
-                  <a:t>DownloadUrlLambdaServiceRole</a:t>
-                </a:r>
-                <a:endParaRPr lang="en-US" altLang="en-US" sz="800" dirty="0">
-                  <a:latin typeface="Arial" panose="020B0604020202020204" pitchFamily="34" charset="0"/>
-                  <a:ea typeface="Amazon Ember" panose="020B0603020204020204" pitchFamily="34" charset="0"/>
-                  <a:cs typeface="Arial" panose="020B0604020202020204" pitchFamily="34" charset="0"/>
-                </a:endParaRPr>
-              </a:p>
-            </p:txBody>
-          </p:sp>
-        </p:grpSp>
+            </a:blip>
+            <a:stretch>
+              <a:fillRect/>
+            </a:stretch>
+          </p:blipFill>
+          <p:spPr>
+            <a:xfrm>
+              <a:off x="3874432" y="4723571"/>
+              <a:ext cx="351241" cy="351241"/>
+            </a:xfrm>
+            <a:prstGeom prst="rect">
+              <a:avLst/>
+            </a:prstGeom>
+          </p:spPr>
+        </p:pic>
         <p:sp>
           <p:nvSpPr>
-            <p:cNvPr id="38" name="Rectangle 62">
+            <p:cNvPr id="22" name="TextBox 29">
               <a:extLst>
                 <a:ext uri="{FF2B5EF4-FFF2-40B4-BE49-F238E27FC236}">
-                  <a16:creationId xmlns:a16="http://schemas.microsoft.com/office/drawing/2014/main" id="{08FA695D-70A0-4F41-8C21-E437C7B3DF77}"/>
+                  <a16:creationId xmlns:a16="http://schemas.microsoft.com/office/drawing/2014/main" id="{0F02AB39-166A-4382-8A27-57908748AFED}"/>
                 </a:ext>
               </a:extLst>
             </p:cNvPr>
-            <p:cNvSpPr/>
+            <p:cNvSpPr txBox="1">
+              <a:spLocks noChangeArrowheads="1"/>
+            </p:cNvSpPr>
             <p:nvPr/>
           </p:nvSpPr>
-          <p:spPr>
+          <p:spPr bwMode="auto">
             <a:xfrm>
-              <a:off x="4476750" y="595996"/>
-              <a:ext cx="2441631" cy="1040113"/>
+              <a:off x="3453540" y="5001879"/>
+              <a:ext cx="1193023" cy="338554"/>
             </a:xfrm>
             <a:prstGeom prst="rect">
               <a:avLst/>
             </a:prstGeom>
             <a:noFill/>
-            <a:ln w="15875">
-              <a:solidFill>
-                <a:srgbClr val="DD344C"/>
-              </a:solidFill>
+            <a:ln>
+              <a:noFill/>
             </a:ln>
+            <a:extLst>
+              <a:ext uri="{909E8E84-426E-40DD-AFC4-6F175D3DCCD1}">
+                <a14:hiddenFill xmlns:a14="http://schemas.microsoft.com/office/drawing/2010/main">
+                  <a:solidFill>
+                    <a:srgbClr val="FFFFFF"/>
+                  </a:solidFill>
+                </a14:hiddenFill>
+              </a:ext>
+              <a:ext uri="{91240B29-F687-4F45-9708-019B960494DF}">
+                <a14:hiddenLine xmlns:a14="http://schemas.microsoft.com/office/drawing/2010/main" w="9525">
+                  <a:solidFill>
+                    <a:srgbClr val="000000"/>
+                  </a:solidFill>
+                  <a:miter lim="800000"/>
+                  <a:headEnd/>
+                  <a:tailEnd/>
+                </a14:hiddenLine>
+              </a:ext>
+            </a:extLst>
           </p:spPr>
-          <p:style>
-            <a:lnRef idx="2">
-              <a:schemeClr val="accent1">
-                <a:shade val="50000"/>
-              </a:schemeClr>
-            </a:lnRef>
-            <a:fillRef idx="1">
-              <a:schemeClr val="accent1"/>
-            </a:fillRef>
-            <a:effectRef idx="0">
-              <a:schemeClr val="accent1"/>
-            </a:effectRef>
-            <a:fontRef idx="minor">
-              <a:schemeClr val="lt1"/>
-            </a:fontRef>
-          </p:style>
           <p:txBody>
-            <a:bodyPr lIns="502920" tIns="91440"/>
+            <a:bodyPr wrap="square">
+              <a:spAutoFit/>
+            </a:bodyPr>
             <a:lstStyle>
               <a:defPPr>
                 <a:defRPr lang="en-US"/>
@@ -7113,14 +6880,14 @@
                 </a:spcAft>
                 <a:defRPr kern="1200">
                   <a:solidFill>
-                    <a:schemeClr val="lt1"/>
+                    <a:schemeClr val="tx1"/>
                   </a:solidFill>
-                  <a:latin typeface="+mn-lt"/>
+                  <a:latin typeface="Calibri" panose="020F0502020204030204" pitchFamily="34" charset="0"/>
                   <a:ea typeface="+mn-ea"/>
                   <a:cs typeface="+mn-cs"/>
                 </a:defRPr>
               </a:lvl1pPr>
-              <a:lvl2pPr marL="457200" algn="l" rtl="0" eaLnBrk="0" fontAlgn="base" hangingPunct="0">
+              <a:lvl2pPr marL="742950" indent="-285750" algn="l" rtl="0" eaLnBrk="0" fontAlgn="base" hangingPunct="0">
                 <a:spcBef>
                   <a:spcPct val="0"/>
                 </a:spcBef>
@@ -7129,14 +6896,14 @@
                 </a:spcAft>
                 <a:defRPr kern="1200">
                   <a:solidFill>
-                    <a:schemeClr val="lt1"/>
+                    <a:schemeClr val="tx1"/>
                   </a:solidFill>
-                  <a:latin typeface="+mn-lt"/>
+                  <a:latin typeface="Calibri" panose="020F0502020204030204" pitchFamily="34" charset="0"/>
                   <a:ea typeface="+mn-ea"/>
                   <a:cs typeface="+mn-cs"/>
                 </a:defRPr>
               </a:lvl2pPr>
-              <a:lvl3pPr marL="914400" algn="l" rtl="0" eaLnBrk="0" fontAlgn="base" hangingPunct="0">
+              <a:lvl3pPr marL="1143000" indent="-228600" algn="l" rtl="0" eaLnBrk="0" fontAlgn="base" hangingPunct="0">
                 <a:spcBef>
                   <a:spcPct val="0"/>
                 </a:spcBef>
@@ -7145,14 +6912,14 @@
                 </a:spcAft>
                 <a:defRPr kern="1200">
                   <a:solidFill>
-                    <a:schemeClr val="lt1"/>
+                    <a:schemeClr val="tx1"/>
                   </a:solidFill>
-                  <a:latin typeface="+mn-lt"/>
+                  <a:latin typeface="Calibri" panose="020F0502020204030204" pitchFamily="34" charset="0"/>
                   <a:ea typeface="+mn-ea"/>
                   <a:cs typeface="+mn-cs"/>
                 </a:defRPr>
               </a:lvl3pPr>
-              <a:lvl4pPr marL="1371600" algn="l" rtl="0" eaLnBrk="0" fontAlgn="base" hangingPunct="0">
+              <a:lvl4pPr marL="1600200" indent="-228600" algn="l" rtl="0" eaLnBrk="0" fontAlgn="base" hangingPunct="0">
                 <a:spcBef>
                   <a:spcPct val="0"/>
                 </a:spcBef>
@@ -7161,14 +6928,14 @@
                 </a:spcAft>
                 <a:defRPr kern="1200">
                   <a:solidFill>
-                    <a:schemeClr val="lt1"/>
+                    <a:schemeClr val="tx1"/>
                   </a:solidFill>
-                  <a:latin typeface="+mn-lt"/>
+                  <a:latin typeface="Calibri" panose="020F0502020204030204" pitchFamily="34" charset="0"/>
                   <a:ea typeface="+mn-ea"/>
                   <a:cs typeface="+mn-cs"/>
                 </a:defRPr>
               </a:lvl4pPr>
-              <a:lvl5pPr marL="1828800" algn="l" rtl="0" eaLnBrk="0" fontAlgn="base" hangingPunct="0">
+              <a:lvl5pPr marL="2057400" indent="-228600" algn="l" rtl="0" eaLnBrk="0" fontAlgn="base" hangingPunct="0">
                 <a:spcBef>
                   <a:spcPct val="0"/>
                 </a:spcBef>
@@ -7177,83 +6944,351 @@
                 </a:spcAft>
                 <a:defRPr kern="1200">
                   <a:solidFill>
-                    <a:schemeClr val="lt1"/>
+                    <a:schemeClr val="tx1"/>
                   </a:solidFill>
-                  <a:latin typeface="+mn-lt"/>
+                  <a:latin typeface="Calibri" panose="020F0502020204030204" pitchFamily="34" charset="0"/>
                   <a:ea typeface="+mn-ea"/>
                   <a:cs typeface="+mn-cs"/>
                 </a:defRPr>
               </a:lvl5pPr>
-              <a:lvl6pPr marL="2286000" algn="l" defTabSz="914400" rtl="0" eaLnBrk="1" latinLnBrk="0" hangingPunct="1">
+              <a:lvl6pPr marL="2514600" indent="-228600" algn="l" defTabSz="914400" rtl="0" eaLnBrk="0" fontAlgn="base" latinLnBrk="0" hangingPunct="0">
+                <a:spcBef>
+                  <a:spcPct val="0"/>
+                </a:spcBef>
+                <a:spcAft>
+                  <a:spcPct val="0"/>
+                </a:spcAft>
                 <a:defRPr kern="1200">
                   <a:solidFill>
-                    <a:schemeClr val="lt1"/>
+                    <a:schemeClr val="tx1"/>
                   </a:solidFill>
-                  <a:latin typeface="+mn-lt"/>
+                  <a:latin typeface="Calibri" panose="020F0502020204030204" pitchFamily="34" charset="0"/>
                   <a:ea typeface="+mn-ea"/>
                   <a:cs typeface="+mn-cs"/>
                 </a:defRPr>
               </a:lvl6pPr>
-              <a:lvl7pPr marL="2743200" algn="l" defTabSz="914400" rtl="0" eaLnBrk="1" latinLnBrk="0" hangingPunct="1">
+              <a:lvl7pPr marL="2971800" indent="-228600" algn="l" defTabSz="914400" rtl="0" eaLnBrk="0" fontAlgn="base" latinLnBrk="0" hangingPunct="0">
+                <a:spcBef>
+                  <a:spcPct val="0"/>
+                </a:spcBef>
+                <a:spcAft>
+                  <a:spcPct val="0"/>
+                </a:spcAft>
                 <a:defRPr kern="1200">
                   <a:solidFill>
-                    <a:schemeClr val="lt1"/>
+                    <a:schemeClr val="tx1"/>
                   </a:solidFill>
-                  <a:latin typeface="+mn-lt"/>
+                  <a:latin typeface="Calibri" panose="020F0502020204030204" pitchFamily="34" charset="0"/>
                   <a:ea typeface="+mn-ea"/>
                   <a:cs typeface="+mn-cs"/>
                 </a:defRPr>
               </a:lvl7pPr>
-              <a:lvl8pPr marL="3200400" algn="l" defTabSz="914400" rtl="0" eaLnBrk="1" latinLnBrk="0" hangingPunct="1">
+              <a:lvl8pPr marL="3429000" indent="-228600" algn="l" defTabSz="914400" rtl="0" eaLnBrk="0" fontAlgn="base" latinLnBrk="0" hangingPunct="0">
+                <a:spcBef>
+                  <a:spcPct val="0"/>
+                </a:spcBef>
+                <a:spcAft>
+                  <a:spcPct val="0"/>
+                </a:spcAft>
                 <a:defRPr kern="1200">
                   <a:solidFill>
-                    <a:schemeClr val="lt1"/>
+                    <a:schemeClr val="tx1"/>
                   </a:solidFill>
-                  <a:latin typeface="+mn-lt"/>
+                  <a:latin typeface="Calibri" panose="020F0502020204030204" pitchFamily="34" charset="0"/>
                   <a:ea typeface="+mn-ea"/>
                   <a:cs typeface="+mn-cs"/>
                 </a:defRPr>
               </a:lvl8pPr>
-              <a:lvl9pPr marL="3657600" algn="l" defTabSz="914400" rtl="0" eaLnBrk="1" latinLnBrk="0" hangingPunct="1">
+              <a:lvl9pPr marL="3886200" indent="-228600" algn="l" defTabSz="914400" rtl="0" eaLnBrk="0" fontAlgn="base" latinLnBrk="0" hangingPunct="0">
+                <a:spcBef>
+                  <a:spcPct val="0"/>
+                </a:spcBef>
+                <a:spcAft>
+                  <a:spcPct val="0"/>
+                </a:spcAft>
                 <a:defRPr kern="1200">
                   <a:solidFill>
-                    <a:schemeClr val="lt1"/>
+                    <a:schemeClr val="tx1"/>
                   </a:solidFill>
-                  <a:latin typeface="+mn-lt"/>
+                  <a:latin typeface="Calibri" panose="020F0502020204030204" pitchFamily="34" charset="0"/>
                   <a:ea typeface="+mn-ea"/>
                   <a:cs typeface="+mn-cs"/>
                 </a:defRPr>
               </a:lvl9pPr>
             </a:lstStyle>
             <a:p>
-              <a:pPr eaLnBrk="1" fontAlgn="auto" hangingPunct="1">
-                <a:spcBef>
-                  <a:spcPts val="0"/>
-                </a:spcBef>
-                <a:spcAft>
-                  <a:spcPts val="0"/>
-                </a:spcAft>
-                <a:defRPr/>
-              </a:pPr>
+              <a:pPr algn="ctr" eaLnBrk="1" hangingPunct="1"/>
               <a:r>
-                <a:rPr lang="en-US" sz="800" dirty="0">
-                  <a:solidFill>
-                    <a:schemeClr val="tx1"/>
-                  </a:solidFill>
+                <a:rPr lang="en-US" altLang="en-US" sz="800" dirty="0" err="1">
                   <a:latin typeface="Arial" panose="020B0604020202020204" pitchFamily="34" charset="0"/>
+                  <a:ea typeface="Amazon Ember" panose="020B0603020204020204" pitchFamily="34" charset="0"/>
                   <a:cs typeface="Arial" panose="020B0604020202020204" pitchFamily="34" charset="0"/>
                 </a:rPr>
-                <a:t>AWS IAM Identity Center</a:t>
+                <a:t>DownloadUrlLambdaServiceRole</a:t>
               </a:r>
+              <a:endParaRPr lang="en-US" altLang="en-US" sz="800" dirty="0">
+                <a:latin typeface="Arial" panose="020B0604020202020204" pitchFamily="34" charset="0"/>
+                <a:ea typeface="Amazon Ember" panose="020B0603020204020204" pitchFamily="34" charset="0"/>
+                <a:cs typeface="Arial" panose="020B0604020202020204" pitchFamily="34" charset="0"/>
+              </a:endParaRPr>
             </a:p>
           </p:txBody>
         </p:sp>
+      </p:grpSp>
+      <p:sp>
+        <p:nvSpPr>
+          <p:cNvPr id="38" name="Rectangle 62">
+            <a:extLst>
+              <a:ext uri="{FF2B5EF4-FFF2-40B4-BE49-F238E27FC236}">
+                <a16:creationId xmlns:a16="http://schemas.microsoft.com/office/drawing/2014/main" id="{08FA695D-70A0-4F41-8C21-E437C7B3DF77}"/>
+              </a:ext>
+            </a:extLst>
+          </p:cNvPr>
+          <p:cNvSpPr/>
+          <p:nvPr/>
+        </p:nvSpPr>
+        <p:spPr>
+          <a:xfrm>
+            <a:off x="5398166" y="1543316"/>
+            <a:ext cx="2441631" cy="1040113"/>
+          </a:xfrm>
+          <a:prstGeom prst="rect">
+            <a:avLst/>
+          </a:prstGeom>
+          <a:noFill/>
+          <a:ln w="15875">
+            <a:solidFill>
+              <a:srgbClr val="DD344C"/>
+            </a:solidFill>
+          </a:ln>
+        </p:spPr>
+        <p:style>
+          <a:lnRef idx="2">
+            <a:schemeClr val="accent1">
+              <a:shade val="50000"/>
+            </a:schemeClr>
+          </a:lnRef>
+          <a:fillRef idx="1">
+            <a:schemeClr val="accent1"/>
+          </a:fillRef>
+          <a:effectRef idx="0">
+            <a:schemeClr val="accent1"/>
+          </a:effectRef>
+          <a:fontRef idx="minor">
+            <a:schemeClr val="lt1"/>
+          </a:fontRef>
+        </p:style>
+        <p:txBody>
+          <a:bodyPr lIns="502920" tIns="91440"/>
+          <a:lstStyle>
+            <a:defPPr>
+              <a:defRPr lang="en-US"/>
+            </a:defPPr>
+            <a:lvl1pPr algn="l" rtl="0" eaLnBrk="0" fontAlgn="base" hangingPunct="0">
+              <a:spcBef>
+                <a:spcPct val="0"/>
+              </a:spcBef>
+              <a:spcAft>
+                <a:spcPct val="0"/>
+              </a:spcAft>
+              <a:defRPr kern="1200">
+                <a:solidFill>
+                  <a:schemeClr val="lt1"/>
+                </a:solidFill>
+                <a:latin typeface="+mn-lt"/>
+                <a:ea typeface="+mn-ea"/>
+                <a:cs typeface="+mn-cs"/>
+              </a:defRPr>
+            </a:lvl1pPr>
+            <a:lvl2pPr marL="457200" algn="l" rtl="0" eaLnBrk="0" fontAlgn="base" hangingPunct="0">
+              <a:spcBef>
+                <a:spcPct val="0"/>
+              </a:spcBef>
+              <a:spcAft>
+                <a:spcPct val="0"/>
+              </a:spcAft>
+              <a:defRPr kern="1200">
+                <a:solidFill>
+                  <a:schemeClr val="lt1"/>
+                </a:solidFill>
+                <a:latin typeface="+mn-lt"/>
+                <a:ea typeface="+mn-ea"/>
+                <a:cs typeface="+mn-cs"/>
+              </a:defRPr>
+            </a:lvl2pPr>
+            <a:lvl3pPr marL="914400" algn="l" rtl="0" eaLnBrk="0" fontAlgn="base" hangingPunct="0">
+              <a:spcBef>
+                <a:spcPct val="0"/>
+              </a:spcBef>
+              <a:spcAft>
+                <a:spcPct val="0"/>
+              </a:spcAft>
+              <a:defRPr kern="1200">
+                <a:solidFill>
+                  <a:schemeClr val="lt1"/>
+                </a:solidFill>
+                <a:latin typeface="+mn-lt"/>
+                <a:ea typeface="+mn-ea"/>
+                <a:cs typeface="+mn-cs"/>
+              </a:defRPr>
+            </a:lvl3pPr>
+            <a:lvl4pPr marL="1371600" algn="l" rtl="0" eaLnBrk="0" fontAlgn="base" hangingPunct="0">
+              <a:spcBef>
+                <a:spcPct val="0"/>
+              </a:spcBef>
+              <a:spcAft>
+                <a:spcPct val="0"/>
+              </a:spcAft>
+              <a:defRPr kern="1200">
+                <a:solidFill>
+                  <a:schemeClr val="lt1"/>
+                </a:solidFill>
+                <a:latin typeface="+mn-lt"/>
+                <a:ea typeface="+mn-ea"/>
+                <a:cs typeface="+mn-cs"/>
+              </a:defRPr>
+            </a:lvl4pPr>
+            <a:lvl5pPr marL="1828800" algn="l" rtl="0" eaLnBrk="0" fontAlgn="base" hangingPunct="0">
+              <a:spcBef>
+                <a:spcPct val="0"/>
+              </a:spcBef>
+              <a:spcAft>
+                <a:spcPct val="0"/>
+              </a:spcAft>
+              <a:defRPr kern="1200">
+                <a:solidFill>
+                  <a:schemeClr val="lt1"/>
+                </a:solidFill>
+                <a:latin typeface="+mn-lt"/>
+                <a:ea typeface="+mn-ea"/>
+                <a:cs typeface="+mn-cs"/>
+              </a:defRPr>
+            </a:lvl5pPr>
+            <a:lvl6pPr marL="2286000" algn="l" defTabSz="914400" rtl="0" eaLnBrk="1" latinLnBrk="0" hangingPunct="1">
+              <a:defRPr kern="1200">
+                <a:solidFill>
+                  <a:schemeClr val="lt1"/>
+                </a:solidFill>
+                <a:latin typeface="+mn-lt"/>
+                <a:ea typeface="+mn-ea"/>
+                <a:cs typeface="+mn-cs"/>
+              </a:defRPr>
+            </a:lvl6pPr>
+            <a:lvl7pPr marL="2743200" algn="l" defTabSz="914400" rtl="0" eaLnBrk="1" latinLnBrk="0" hangingPunct="1">
+              <a:defRPr kern="1200">
+                <a:solidFill>
+                  <a:schemeClr val="lt1"/>
+                </a:solidFill>
+                <a:latin typeface="+mn-lt"/>
+                <a:ea typeface="+mn-ea"/>
+                <a:cs typeface="+mn-cs"/>
+              </a:defRPr>
+            </a:lvl7pPr>
+            <a:lvl8pPr marL="3200400" algn="l" defTabSz="914400" rtl="0" eaLnBrk="1" latinLnBrk="0" hangingPunct="1">
+              <a:defRPr kern="1200">
+                <a:solidFill>
+                  <a:schemeClr val="lt1"/>
+                </a:solidFill>
+                <a:latin typeface="+mn-lt"/>
+                <a:ea typeface="+mn-ea"/>
+                <a:cs typeface="+mn-cs"/>
+              </a:defRPr>
+            </a:lvl8pPr>
+            <a:lvl9pPr marL="3657600" algn="l" defTabSz="914400" rtl="0" eaLnBrk="1" latinLnBrk="0" hangingPunct="1">
+              <a:defRPr kern="1200">
+                <a:solidFill>
+                  <a:schemeClr val="lt1"/>
+                </a:solidFill>
+                <a:latin typeface="+mn-lt"/>
+                <a:ea typeface="+mn-ea"/>
+                <a:cs typeface="+mn-cs"/>
+              </a:defRPr>
+            </a:lvl9pPr>
+          </a:lstStyle>
+          <a:p>
+            <a:pPr eaLnBrk="1" fontAlgn="auto" hangingPunct="1">
+              <a:spcBef>
+                <a:spcPts val="0"/>
+              </a:spcBef>
+              <a:spcAft>
+                <a:spcPts val="0"/>
+              </a:spcAft>
+              <a:defRPr/>
+            </a:pPr>
+            <a:r>
+              <a:rPr lang="en-US" sz="800" dirty="0">
+                <a:solidFill>
+                  <a:schemeClr val="tx1"/>
+                </a:solidFill>
+                <a:latin typeface="Arial" panose="020B0604020202020204" pitchFamily="34" charset="0"/>
+                <a:cs typeface="Arial" panose="020B0604020202020204" pitchFamily="34" charset="0"/>
+              </a:rPr>
+              <a:t>AWS IAM Identity Center</a:t>
+            </a:r>
+          </a:p>
+        </p:txBody>
+      </p:sp>
+      <p:pic>
+        <p:nvPicPr>
+          <p:cNvPr id="39" name="Graphic 63">
+            <a:extLst>
+              <a:ext uri="{FF2B5EF4-FFF2-40B4-BE49-F238E27FC236}">
+                <a16:creationId xmlns:a16="http://schemas.microsoft.com/office/drawing/2014/main" id="{DA91B879-1EA9-4070-9829-D532FB7C5879}"/>
+              </a:ext>
+            </a:extLst>
+          </p:cNvPr>
+          <p:cNvPicPr>
+            <a:picLocks noChangeAspect="1"/>
+          </p:cNvPicPr>
+          <p:nvPr/>
+        </p:nvPicPr>
+        <p:blipFill>
+          <a:blip r:embed="rId14">
+            <a:extLst>
+              <a:ext uri="{96DAC541-7B7A-43D3-8B79-37D633B846F1}">
+                <asvg:svgBlip xmlns:asvg="http://schemas.microsoft.com/office/drawing/2016/SVG/main" r:embed="rId15"/>
+              </a:ext>
+            </a:extLst>
+          </a:blip>
+          <a:srcRect/>
+          <a:stretch/>
+        </p:blipFill>
+        <p:spPr>
+          <a:xfrm>
+            <a:off x="5398166" y="1543315"/>
+            <a:ext cx="381000" cy="381000"/>
+          </a:xfrm>
+          <a:prstGeom prst="rect">
+            <a:avLst/>
+          </a:prstGeom>
+        </p:spPr>
+      </p:pic>
+      <p:grpSp>
+        <p:nvGrpSpPr>
+          <p:cNvPr id="45" name="Gruppieren 44">
+            <a:extLst>
+              <a:ext uri="{FF2B5EF4-FFF2-40B4-BE49-F238E27FC236}">
+                <a16:creationId xmlns:a16="http://schemas.microsoft.com/office/drawing/2014/main" id="{5B9BD941-FB5E-E6CF-B177-B629323F1CDD}"/>
+              </a:ext>
+            </a:extLst>
+          </p:cNvPr>
+          <p:cNvGrpSpPr/>
+          <p:nvPr/>
+        </p:nvGrpSpPr>
+        <p:grpSpPr>
+          <a:xfrm>
+            <a:off x="6564942" y="1890747"/>
+            <a:ext cx="1049776" cy="615553"/>
+            <a:chOff x="3515874" y="4723571"/>
+            <a:chExt cx="1049776" cy="615553"/>
+          </a:xfrm>
+        </p:grpSpPr>
         <p:pic>
           <p:nvPicPr>
-            <p:cNvPr id="39" name="Graphic 63">
+            <p:cNvPr id="46" name="Graphic 72" descr="Role resource icon for the IAM service.">
               <a:extLst>
                 <a:ext uri="{FF2B5EF4-FFF2-40B4-BE49-F238E27FC236}">
-                  <a16:creationId xmlns:a16="http://schemas.microsoft.com/office/drawing/2014/main" id="{DA91B879-1EA9-4070-9829-D532FB7C5879}"/>
+                  <a16:creationId xmlns:a16="http://schemas.microsoft.com/office/drawing/2014/main" id="{F141BCE7-678C-12BD-1C4F-44B955D134AB}"/>
                 </a:ext>
               </a:extLst>
             </p:cNvPr>
@@ -7263,300 +7298,244 @@
             <p:nvPr/>
           </p:nvPicPr>
           <p:blipFill>
-            <a:blip r:embed="rId14">
+            <a:blip r:embed="rId12">
               <a:extLst>
-                <a:ext uri="{28A0092B-C50C-407E-A947-70E740481C1C}">
-                  <a14:useLocalDpi xmlns:a14="http://schemas.microsoft.com/office/drawing/2010/main" val="0"/>
+                <a:ext uri="{96DAC541-7B7A-43D3-8B79-37D633B846F1}">
+                  <asvg:svgBlip xmlns:asvg="http://schemas.microsoft.com/office/drawing/2016/SVG/main" r:embed="rId13"/>
                 </a:ext>
               </a:extLst>
             </a:blip>
-            <a:srcRect/>
-            <a:stretch/>
+            <a:stretch>
+              <a:fillRect/>
+            </a:stretch>
           </p:blipFill>
           <p:spPr>
             <a:xfrm>
-              <a:off x="4476750" y="595995"/>
-              <a:ext cx="381000" cy="381000"/>
+              <a:off x="3874432" y="4723571"/>
+              <a:ext cx="351241" cy="351241"/>
             </a:xfrm>
             <a:prstGeom prst="rect">
               <a:avLst/>
             </a:prstGeom>
           </p:spPr>
         </p:pic>
-        <p:grpSp>
-          <p:nvGrpSpPr>
-            <p:cNvPr id="45" name="Gruppieren 44">
+        <p:sp>
+          <p:nvSpPr>
+            <p:cNvPr id="47" name="TextBox 29">
               <a:extLst>
                 <a:ext uri="{FF2B5EF4-FFF2-40B4-BE49-F238E27FC236}">
-                  <a16:creationId xmlns:a16="http://schemas.microsoft.com/office/drawing/2014/main" id="{5B9BD941-FB5E-E6CF-B177-B629323F1CDD}"/>
+                  <a16:creationId xmlns:a16="http://schemas.microsoft.com/office/drawing/2014/main" id="{08E4E134-0D52-72C9-AE76-C4C6BCA5C49C}"/>
                 </a:ext>
               </a:extLst>
             </p:cNvPr>
-            <p:cNvGrpSpPr/>
+            <p:cNvSpPr txBox="1">
+              <a:spLocks noChangeArrowheads="1"/>
+            </p:cNvSpPr>
             <p:nvPr/>
-          </p:nvGrpSpPr>
-          <p:grpSpPr>
+          </p:nvSpPr>
+          <p:spPr bwMode="auto">
             <a:xfrm>
-              <a:off x="5643526" y="943427"/>
-              <a:ext cx="1049776" cy="615553"/>
-              <a:chOff x="3515874" y="4723571"/>
-              <a:chExt cx="1049776" cy="615553"/>
+              <a:off x="3515874" y="5000570"/>
+              <a:ext cx="1049776" cy="338554"/>
             </a:xfrm>
-          </p:grpSpPr>
-          <p:pic>
-            <p:nvPicPr>
-              <p:cNvPr id="46" name="Graphic 72" descr="Role resource icon for the IAM service.">
-                <a:extLst>
-                  <a:ext uri="{FF2B5EF4-FFF2-40B4-BE49-F238E27FC236}">
-                    <a16:creationId xmlns:a16="http://schemas.microsoft.com/office/drawing/2014/main" id="{F141BCE7-678C-12BD-1C4F-44B955D134AB}"/>
-                  </a:ext>
-                </a:extLst>
-              </p:cNvPr>
-              <p:cNvPicPr>
-                <a:picLocks noChangeAspect="1"/>
-              </p:cNvPicPr>
-              <p:nvPr/>
-            </p:nvPicPr>
-            <p:blipFill>
-              <a:blip r:embed="rId12">
-                <a:extLst>
-                  <a:ext uri="{96DAC541-7B7A-43D3-8B79-37D633B846F1}">
-                    <asvg:svgBlip xmlns:asvg="http://schemas.microsoft.com/office/drawing/2016/SVG/main" r:embed="rId13"/>
-                  </a:ext>
-                </a:extLst>
-              </a:blip>
-              <a:stretch>
-                <a:fillRect/>
-              </a:stretch>
-            </p:blipFill>
-            <p:spPr>
-              <a:xfrm>
-                <a:off x="3874432" y="4723571"/>
-                <a:ext cx="351241" cy="351241"/>
-              </a:xfrm>
-              <a:prstGeom prst="rect">
-                <a:avLst/>
-              </a:prstGeom>
-            </p:spPr>
-          </p:pic>
-          <p:sp>
-            <p:nvSpPr>
-              <p:cNvPr id="47" name="TextBox 29">
-                <a:extLst>
-                  <a:ext uri="{FF2B5EF4-FFF2-40B4-BE49-F238E27FC236}">
-                    <a16:creationId xmlns:a16="http://schemas.microsoft.com/office/drawing/2014/main" id="{08E4E134-0D52-72C9-AE76-C4C6BCA5C49C}"/>
-                  </a:ext>
-                </a:extLst>
-              </p:cNvPr>
-              <p:cNvSpPr txBox="1">
-                <a:spLocks noChangeArrowheads="1"/>
-              </p:cNvSpPr>
-              <p:nvPr/>
-            </p:nvSpPr>
-            <p:spPr bwMode="auto">
-              <a:xfrm>
-                <a:off x="3515874" y="5000570"/>
-                <a:ext cx="1049776" cy="338554"/>
-              </a:xfrm>
-              <a:prstGeom prst="rect">
-                <a:avLst/>
-              </a:prstGeom>
+            <a:prstGeom prst="rect">
+              <a:avLst/>
+            </a:prstGeom>
+            <a:noFill/>
+            <a:ln>
               <a:noFill/>
-              <a:ln>
-                <a:noFill/>
-              </a:ln>
-              <a:extLst>
-                <a:ext uri="{909E8E84-426E-40DD-AFC4-6F175D3DCCD1}">
-                  <a14:hiddenFill xmlns:a14="http://schemas.microsoft.com/office/drawing/2010/main">
-                    <a:solidFill>
-                      <a:srgbClr val="FFFFFF"/>
-                    </a:solidFill>
-                  </a14:hiddenFill>
-                </a:ext>
-                <a:ext uri="{91240B29-F687-4F45-9708-019B960494DF}">
-                  <a14:hiddenLine xmlns:a14="http://schemas.microsoft.com/office/drawing/2010/main" w="9525">
-                    <a:solidFill>
-                      <a:srgbClr val="000000"/>
-                    </a:solidFill>
-                    <a:miter lim="800000"/>
-                    <a:headEnd/>
-                    <a:tailEnd/>
-                  </a14:hiddenLine>
-                </a:ext>
-              </a:extLst>
-            </p:spPr>
-            <p:txBody>
-              <a:bodyPr wrap="square">
-                <a:spAutoFit/>
-              </a:bodyPr>
-              <a:lstStyle>
-                <a:defPPr>
-                  <a:defRPr lang="en-US"/>
-                </a:defPPr>
-                <a:lvl1pPr algn="l" rtl="0" eaLnBrk="0" fontAlgn="base" hangingPunct="0">
-                  <a:spcBef>
-                    <a:spcPct val="0"/>
-                  </a:spcBef>
-                  <a:spcAft>
-                    <a:spcPct val="0"/>
-                  </a:spcAft>
-                  <a:defRPr kern="1200">
-                    <a:solidFill>
-                      <a:schemeClr val="tx1"/>
-                    </a:solidFill>
-                    <a:latin typeface="Calibri" panose="020F0502020204030204" pitchFamily="34" charset="0"/>
-                    <a:ea typeface="+mn-ea"/>
-                    <a:cs typeface="+mn-cs"/>
-                  </a:defRPr>
-                </a:lvl1pPr>
-                <a:lvl2pPr marL="742950" indent="-285750" algn="l" rtl="0" eaLnBrk="0" fontAlgn="base" hangingPunct="0">
-                  <a:spcBef>
-                    <a:spcPct val="0"/>
-                  </a:spcBef>
-                  <a:spcAft>
-                    <a:spcPct val="0"/>
-                  </a:spcAft>
-                  <a:defRPr kern="1200">
-                    <a:solidFill>
-                      <a:schemeClr val="tx1"/>
-                    </a:solidFill>
-                    <a:latin typeface="Calibri" panose="020F0502020204030204" pitchFamily="34" charset="0"/>
-                    <a:ea typeface="+mn-ea"/>
-                    <a:cs typeface="+mn-cs"/>
-                  </a:defRPr>
-                </a:lvl2pPr>
-                <a:lvl3pPr marL="1143000" indent="-228600" algn="l" rtl="0" eaLnBrk="0" fontAlgn="base" hangingPunct="0">
-                  <a:spcBef>
-                    <a:spcPct val="0"/>
-                  </a:spcBef>
-                  <a:spcAft>
-                    <a:spcPct val="0"/>
-                  </a:spcAft>
-                  <a:defRPr kern="1200">
-                    <a:solidFill>
-                      <a:schemeClr val="tx1"/>
-                    </a:solidFill>
-                    <a:latin typeface="Calibri" panose="020F0502020204030204" pitchFamily="34" charset="0"/>
-                    <a:ea typeface="+mn-ea"/>
-                    <a:cs typeface="+mn-cs"/>
-                  </a:defRPr>
-                </a:lvl3pPr>
-                <a:lvl4pPr marL="1600200" indent="-228600" algn="l" rtl="0" eaLnBrk="0" fontAlgn="base" hangingPunct="0">
-                  <a:spcBef>
-                    <a:spcPct val="0"/>
-                  </a:spcBef>
-                  <a:spcAft>
-                    <a:spcPct val="0"/>
-                  </a:spcAft>
-                  <a:defRPr kern="1200">
-                    <a:solidFill>
-                      <a:schemeClr val="tx1"/>
-                    </a:solidFill>
-                    <a:latin typeface="Calibri" panose="020F0502020204030204" pitchFamily="34" charset="0"/>
-                    <a:ea typeface="+mn-ea"/>
-                    <a:cs typeface="+mn-cs"/>
-                  </a:defRPr>
-                </a:lvl4pPr>
-                <a:lvl5pPr marL="2057400" indent="-228600" algn="l" rtl="0" eaLnBrk="0" fontAlgn="base" hangingPunct="0">
-                  <a:spcBef>
-                    <a:spcPct val="0"/>
-                  </a:spcBef>
-                  <a:spcAft>
-                    <a:spcPct val="0"/>
-                  </a:spcAft>
-                  <a:defRPr kern="1200">
-                    <a:solidFill>
-                      <a:schemeClr val="tx1"/>
-                    </a:solidFill>
-                    <a:latin typeface="Calibri" panose="020F0502020204030204" pitchFamily="34" charset="0"/>
-                    <a:ea typeface="+mn-ea"/>
-                    <a:cs typeface="+mn-cs"/>
-                  </a:defRPr>
-                </a:lvl5pPr>
-                <a:lvl6pPr marL="2514600" indent="-228600" algn="l" defTabSz="914400" rtl="0" eaLnBrk="0" fontAlgn="base" latinLnBrk="0" hangingPunct="0">
-                  <a:spcBef>
-                    <a:spcPct val="0"/>
-                  </a:spcBef>
-                  <a:spcAft>
-                    <a:spcPct val="0"/>
-                  </a:spcAft>
-                  <a:defRPr kern="1200">
-                    <a:solidFill>
-                      <a:schemeClr val="tx1"/>
-                    </a:solidFill>
-                    <a:latin typeface="Calibri" panose="020F0502020204030204" pitchFamily="34" charset="0"/>
-                    <a:ea typeface="+mn-ea"/>
-                    <a:cs typeface="+mn-cs"/>
-                  </a:defRPr>
-                </a:lvl6pPr>
-                <a:lvl7pPr marL="2971800" indent="-228600" algn="l" defTabSz="914400" rtl="0" eaLnBrk="0" fontAlgn="base" latinLnBrk="0" hangingPunct="0">
-                  <a:spcBef>
-                    <a:spcPct val="0"/>
-                  </a:spcBef>
-                  <a:spcAft>
-                    <a:spcPct val="0"/>
-                  </a:spcAft>
-                  <a:defRPr kern="1200">
-                    <a:solidFill>
-                      <a:schemeClr val="tx1"/>
-                    </a:solidFill>
-                    <a:latin typeface="Calibri" panose="020F0502020204030204" pitchFamily="34" charset="0"/>
-                    <a:ea typeface="+mn-ea"/>
-                    <a:cs typeface="+mn-cs"/>
-                  </a:defRPr>
-                </a:lvl7pPr>
-                <a:lvl8pPr marL="3429000" indent="-228600" algn="l" defTabSz="914400" rtl="0" eaLnBrk="0" fontAlgn="base" latinLnBrk="0" hangingPunct="0">
-                  <a:spcBef>
-                    <a:spcPct val="0"/>
-                  </a:spcBef>
-                  <a:spcAft>
-                    <a:spcPct val="0"/>
-                  </a:spcAft>
-                  <a:defRPr kern="1200">
-                    <a:solidFill>
-                      <a:schemeClr val="tx1"/>
-                    </a:solidFill>
-                    <a:latin typeface="Calibri" panose="020F0502020204030204" pitchFamily="34" charset="0"/>
-                    <a:ea typeface="+mn-ea"/>
-                    <a:cs typeface="+mn-cs"/>
-                  </a:defRPr>
-                </a:lvl8pPr>
-                <a:lvl9pPr marL="3886200" indent="-228600" algn="l" defTabSz="914400" rtl="0" eaLnBrk="0" fontAlgn="base" latinLnBrk="0" hangingPunct="0">
-                  <a:spcBef>
-                    <a:spcPct val="0"/>
-                  </a:spcBef>
-                  <a:spcAft>
-                    <a:spcPct val="0"/>
-                  </a:spcAft>
-                  <a:defRPr kern="1200">
-                    <a:solidFill>
-                      <a:schemeClr val="tx1"/>
-                    </a:solidFill>
-                    <a:latin typeface="Calibri" panose="020F0502020204030204" pitchFamily="34" charset="0"/>
-                    <a:ea typeface="+mn-ea"/>
-                    <a:cs typeface="+mn-cs"/>
-                  </a:defRPr>
-                </a:lvl9pPr>
-              </a:lstStyle>
-              <a:p>
-                <a:pPr algn="ctr" eaLnBrk="1" hangingPunct="1"/>
-                <a:r>
-                  <a:rPr lang="en-US" altLang="en-US" sz="800" dirty="0" err="1">
-                    <a:latin typeface="Arial" panose="020B0604020202020204" pitchFamily="34" charset="0"/>
-                    <a:ea typeface="Amazon Ember" panose="020B0603020204020204" pitchFamily="34" charset="0"/>
-                    <a:cs typeface="Arial" panose="020B0604020202020204" pitchFamily="34" charset="0"/>
-                  </a:rPr>
-                  <a:t>UploadUrlLambdaServiceRole</a:t>
-                </a:r>
-                <a:endParaRPr lang="en-US" altLang="en-US" sz="800" dirty="0">
+            </a:ln>
+            <a:extLst>
+              <a:ext uri="{909E8E84-426E-40DD-AFC4-6F175D3DCCD1}">
+                <a14:hiddenFill xmlns:a14="http://schemas.microsoft.com/office/drawing/2010/main">
+                  <a:solidFill>
+                    <a:srgbClr val="FFFFFF"/>
+                  </a:solidFill>
+                </a14:hiddenFill>
+              </a:ext>
+              <a:ext uri="{91240B29-F687-4F45-9708-019B960494DF}">
+                <a14:hiddenLine xmlns:a14="http://schemas.microsoft.com/office/drawing/2010/main" w="9525">
+                  <a:solidFill>
+                    <a:srgbClr val="000000"/>
+                  </a:solidFill>
+                  <a:miter lim="800000"/>
+                  <a:headEnd/>
+                  <a:tailEnd/>
+                </a14:hiddenLine>
+              </a:ext>
+            </a:extLst>
+          </p:spPr>
+          <p:txBody>
+            <a:bodyPr wrap="square">
+              <a:spAutoFit/>
+            </a:bodyPr>
+            <a:lstStyle>
+              <a:defPPr>
+                <a:defRPr lang="en-US"/>
+              </a:defPPr>
+              <a:lvl1pPr algn="l" rtl="0" eaLnBrk="0" fontAlgn="base" hangingPunct="0">
+                <a:spcBef>
+                  <a:spcPct val="0"/>
+                </a:spcBef>
+                <a:spcAft>
+                  <a:spcPct val="0"/>
+                </a:spcAft>
+                <a:defRPr kern="1200">
+                  <a:solidFill>
+                    <a:schemeClr val="tx1"/>
+                  </a:solidFill>
+                  <a:latin typeface="Calibri" panose="020F0502020204030204" pitchFamily="34" charset="0"/>
+                  <a:ea typeface="+mn-ea"/>
+                  <a:cs typeface="+mn-cs"/>
+                </a:defRPr>
+              </a:lvl1pPr>
+              <a:lvl2pPr marL="742950" indent="-285750" algn="l" rtl="0" eaLnBrk="0" fontAlgn="base" hangingPunct="0">
+                <a:spcBef>
+                  <a:spcPct val="0"/>
+                </a:spcBef>
+                <a:spcAft>
+                  <a:spcPct val="0"/>
+                </a:spcAft>
+                <a:defRPr kern="1200">
+                  <a:solidFill>
+                    <a:schemeClr val="tx1"/>
+                  </a:solidFill>
+                  <a:latin typeface="Calibri" panose="020F0502020204030204" pitchFamily="34" charset="0"/>
+                  <a:ea typeface="+mn-ea"/>
+                  <a:cs typeface="+mn-cs"/>
+                </a:defRPr>
+              </a:lvl2pPr>
+              <a:lvl3pPr marL="1143000" indent="-228600" algn="l" rtl="0" eaLnBrk="0" fontAlgn="base" hangingPunct="0">
+                <a:spcBef>
+                  <a:spcPct val="0"/>
+                </a:spcBef>
+                <a:spcAft>
+                  <a:spcPct val="0"/>
+                </a:spcAft>
+                <a:defRPr kern="1200">
+                  <a:solidFill>
+                    <a:schemeClr val="tx1"/>
+                  </a:solidFill>
+                  <a:latin typeface="Calibri" panose="020F0502020204030204" pitchFamily="34" charset="0"/>
+                  <a:ea typeface="+mn-ea"/>
+                  <a:cs typeface="+mn-cs"/>
+                </a:defRPr>
+              </a:lvl3pPr>
+              <a:lvl4pPr marL="1600200" indent="-228600" algn="l" rtl="0" eaLnBrk="0" fontAlgn="base" hangingPunct="0">
+                <a:spcBef>
+                  <a:spcPct val="0"/>
+                </a:spcBef>
+                <a:spcAft>
+                  <a:spcPct val="0"/>
+                </a:spcAft>
+                <a:defRPr kern="1200">
+                  <a:solidFill>
+                    <a:schemeClr val="tx1"/>
+                  </a:solidFill>
+                  <a:latin typeface="Calibri" panose="020F0502020204030204" pitchFamily="34" charset="0"/>
+                  <a:ea typeface="+mn-ea"/>
+                  <a:cs typeface="+mn-cs"/>
+                </a:defRPr>
+              </a:lvl4pPr>
+              <a:lvl5pPr marL="2057400" indent="-228600" algn="l" rtl="0" eaLnBrk="0" fontAlgn="base" hangingPunct="0">
+                <a:spcBef>
+                  <a:spcPct val="0"/>
+                </a:spcBef>
+                <a:spcAft>
+                  <a:spcPct val="0"/>
+                </a:spcAft>
+                <a:defRPr kern="1200">
+                  <a:solidFill>
+                    <a:schemeClr val="tx1"/>
+                  </a:solidFill>
+                  <a:latin typeface="Calibri" panose="020F0502020204030204" pitchFamily="34" charset="0"/>
+                  <a:ea typeface="+mn-ea"/>
+                  <a:cs typeface="+mn-cs"/>
+                </a:defRPr>
+              </a:lvl5pPr>
+              <a:lvl6pPr marL="2514600" indent="-228600" algn="l" defTabSz="914400" rtl="0" eaLnBrk="0" fontAlgn="base" latinLnBrk="0" hangingPunct="0">
+                <a:spcBef>
+                  <a:spcPct val="0"/>
+                </a:spcBef>
+                <a:spcAft>
+                  <a:spcPct val="0"/>
+                </a:spcAft>
+                <a:defRPr kern="1200">
+                  <a:solidFill>
+                    <a:schemeClr val="tx1"/>
+                  </a:solidFill>
+                  <a:latin typeface="Calibri" panose="020F0502020204030204" pitchFamily="34" charset="0"/>
+                  <a:ea typeface="+mn-ea"/>
+                  <a:cs typeface="+mn-cs"/>
+                </a:defRPr>
+              </a:lvl6pPr>
+              <a:lvl7pPr marL="2971800" indent="-228600" algn="l" defTabSz="914400" rtl="0" eaLnBrk="0" fontAlgn="base" latinLnBrk="0" hangingPunct="0">
+                <a:spcBef>
+                  <a:spcPct val="0"/>
+                </a:spcBef>
+                <a:spcAft>
+                  <a:spcPct val="0"/>
+                </a:spcAft>
+                <a:defRPr kern="1200">
+                  <a:solidFill>
+                    <a:schemeClr val="tx1"/>
+                  </a:solidFill>
+                  <a:latin typeface="Calibri" panose="020F0502020204030204" pitchFamily="34" charset="0"/>
+                  <a:ea typeface="+mn-ea"/>
+                  <a:cs typeface="+mn-cs"/>
+                </a:defRPr>
+              </a:lvl7pPr>
+              <a:lvl8pPr marL="3429000" indent="-228600" algn="l" defTabSz="914400" rtl="0" eaLnBrk="0" fontAlgn="base" latinLnBrk="0" hangingPunct="0">
+                <a:spcBef>
+                  <a:spcPct val="0"/>
+                </a:spcBef>
+                <a:spcAft>
+                  <a:spcPct val="0"/>
+                </a:spcAft>
+                <a:defRPr kern="1200">
+                  <a:solidFill>
+                    <a:schemeClr val="tx1"/>
+                  </a:solidFill>
+                  <a:latin typeface="Calibri" panose="020F0502020204030204" pitchFamily="34" charset="0"/>
+                  <a:ea typeface="+mn-ea"/>
+                  <a:cs typeface="+mn-cs"/>
+                </a:defRPr>
+              </a:lvl8pPr>
+              <a:lvl9pPr marL="3886200" indent="-228600" algn="l" defTabSz="914400" rtl="0" eaLnBrk="0" fontAlgn="base" latinLnBrk="0" hangingPunct="0">
+                <a:spcBef>
+                  <a:spcPct val="0"/>
+                </a:spcBef>
+                <a:spcAft>
+                  <a:spcPct val="0"/>
+                </a:spcAft>
+                <a:defRPr kern="1200">
+                  <a:solidFill>
+                    <a:schemeClr val="tx1"/>
+                  </a:solidFill>
+                  <a:latin typeface="Calibri" panose="020F0502020204030204" pitchFamily="34" charset="0"/>
+                  <a:ea typeface="+mn-ea"/>
+                  <a:cs typeface="+mn-cs"/>
+                </a:defRPr>
+              </a:lvl9pPr>
+            </a:lstStyle>
+            <a:p>
+              <a:pPr algn="ctr" eaLnBrk="1" hangingPunct="1"/>
+              <a:r>
+                <a:rPr lang="en-US" altLang="en-US" sz="800" dirty="0" err="1">
                   <a:latin typeface="Arial" panose="020B0604020202020204" pitchFamily="34" charset="0"/>
                   <a:ea typeface="Amazon Ember" panose="020B0603020204020204" pitchFamily="34" charset="0"/>
                   <a:cs typeface="Arial" panose="020B0604020202020204" pitchFamily="34" charset="0"/>
-                </a:endParaRPr>
-              </a:p>
-            </p:txBody>
-          </p:sp>
-        </p:grpSp>
+                </a:rPr>
+                <a:t>UploadUrlLambdaServiceRole</a:t>
+              </a:r>
+              <a:endParaRPr lang="en-US" altLang="en-US" sz="800" dirty="0">
+                <a:latin typeface="Arial" panose="020B0604020202020204" pitchFamily="34" charset="0"/>
+                <a:ea typeface="Amazon Ember" panose="020B0603020204020204" pitchFamily="34" charset="0"/>
+                <a:cs typeface="Arial" panose="020B0604020202020204" pitchFamily="34" charset="0"/>
+              </a:endParaRPr>
+            </a:p>
+          </p:txBody>
+        </p:sp>
       </p:grpSp>
       <p:grpSp>
         <p:nvGrpSpPr>
@@ -7613,10 +7592,10 @@
               <p:nvPr/>
             </p:nvPicPr>
             <p:blipFill>
-              <a:blip r:embed="rId15">
+              <a:blip r:embed="rId16">
                 <a:extLst>
                   <a:ext uri="{96DAC541-7B7A-43D3-8B79-37D633B846F1}">
-                    <asvg:svgBlip xmlns:asvg="http://schemas.microsoft.com/office/drawing/2016/SVG/main" r:embed="rId16"/>
+                    <asvg:svgBlip xmlns:asvg="http://schemas.microsoft.com/office/drawing/2016/SVG/main" r:embed="rId17"/>
                   </a:ext>
                 </a:extLst>
               </a:blip>
@@ -8114,10 +8093,10 @@
             <p:nvPr/>
           </p:nvPicPr>
           <p:blipFill>
-            <a:blip r:embed="rId17">
+            <a:blip r:embed="rId18">
               <a:extLst>
                 <a:ext uri="{96DAC541-7B7A-43D3-8B79-37D633B846F1}">
-                  <asvg:svgBlip xmlns:asvg="http://schemas.microsoft.com/office/drawing/2016/SVG/main" r:embed="rId18"/>
+                  <asvg:svgBlip xmlns:asvg="http://schemas.microsoft.com/office/drawing/2016/SVG/main" r:embed="rId19"/>
                 </a:ext>
               </a:extLst>
             </a:blip>
@@ -8169,10 +8148,10 @@
               <p:nvPr/>
             </p:nvPicPr>
             <p:blipFill>
-              <a:blip r:embed="rId15">
+              <a:blip r:embed="rId16">
                 <a:extLst>
                   <a:ext uri="{96DAC541-7B7A-43D3-8B79-37D633B846F1}">
-                    <asvg:svgBlip xmlns:asvg="http://schemas.microsoft.com/office/drawing/2016/SVG/main" r:embed="rId16"/>
+                    <asvg:svgBlip xmlns:asvg="http://schemas.microsoft.com/office/drawing/2016/SVG/main" r:embed="rId17"/>
                   </a:ext>
                 </a:extLst>
               </a:blip>
@@ -8457,10 +8436,10 @@
           <p:nvPr/>
         </p:nvPicPr>
         <p:blipFill>
-          <a:blip r:embed="rId19">
+          <a:blip r:embed="rId20">
             <a:extLst>
               <a:ext uri="{96DAC541-7B7A-43D3-8B79-37D633B846F1}">
-                <asvg:svgBlip xmlns:asvg="http://schemas.microsoft.com/office/drawing/2016/SVG/main" r:embed="rId20"/>
+                <asvg:svgBlip xmlns:asvg="http://schemas.microsoft.com/office/drawing/2016/SVG/main" r:embed="rId21"/>
               </a:ext>
             </a:extLst>
           </a:blip>
@@ -8726,10 +8705,10 @@
           <p:nvPr/>
         </p:nvPicPr>
         <p:blipFill>
-          <a:blip r:embed="rId21">
+          <a:blip r:embed="rId22">
             <a:extLst>
               <a:ext uri="{96DAC541-7B7A-43D3-8B79-37D633B846F1}">
-                <asvg:svgBlip xmlns:asvg="http://schemas.microsoft.com/office/drawing/2016/SVG/main" r:embed="rId22"/>
+                <asvg:svgBlip xmlns:asvg="http://schemas.microsoft.com/office/drawing/2016/SVG/main" r:embed="rId23"/>
               </a:ext>
             </a:extLst>
           </a:blip>
